--- a/presentations/final_deck.pptx
+++ b/presentations/final_deck.pptx
@@ -25,7 +25,6 @@
     <p:sldId id="273" r:id="rId24"/>
     <p:sldId id="274" r:id="rId25"/>
     <p:sldId id="275" r:id="rId26"/>
-    <p:sldId id="276" r:id="rId27"/>
   </p:sldIdLst>
   <p:sldSz cx="12191695" cy="6858000" type="screen4x3"/>
   <p:notesSz cx="6858000" cy="9144000"/>
@@ -7128,7 +7127,7 @@
         </p:nvSpPr>
         <p:spPr>
           <a:xfrm>
-            <a:off x="548640" y="4937760"/>
+            <a:off x="548640" y="4892040"/>
             <a:ext cx="10972800" cy="365760"/>
           </a:xfrm>
           <a:prstGeom prst="rect">
@@ -7162,8 +7161,8 @@
         </p:nvSpPr>
         <p:spPr>
           <a:xfrm>
-            <a:off x="548640" y="5394960"/>
-            <a:ext cx="10972800" cy="914400"/>
+            <a:off x="548640" y="5257800"/>
+            <a:ext cx="11064240" cy="822960"/>
           </a:xfrm>
           <a:prstGeom prst="rect">
             <a:avLst/>
@@ -7177,7 +7176,40 @@
           <a:lstStyle/>
           <a:p>
             <a:r>
-              <a:rPr sz="1200" b="0" i="0">
+              <a:rPr sz="1100" b="0" i="1">
+                <a:solidFill>
+                  <a:srgbClr val="6C757D"/>
+                </a:solidFill>
+              </a:rPr>
+              <a:t>Every query filters `WHERE ship_country = 'IN'` — a no-op today because the source is India-only, but the pattern makes the dashboards resilient to international expansion. If the accepted-values canary in staging fires (source contains `US`), the dashboard doesn't silently start mixing markets.</a:t>
+            </a:r>
+          </a:p>
+        </p:txBody>
+      </p:sp>
+      <p:sp>
+        <p:nvSpPr>
+          <p:cNvPr id="15" name="TextBox 14"/>
+          <p:cNvSpPr txBox="1"/>
+          <p:nvPr/>
+        </p:nvSpPr>
+        <p:spPr>
+          <a:xfrm>
+            <a:off x="548640" y="6080760"/>
+            <a:ext cx="10972800" cy="731520"/>
+          </a:xfrm>
+          <a:prstGeom prst="rect">
+            <a:avLst/>
+          </a:prstGeom>
+          <a:noFill/>
+        </p:spPr>
+        <p:txBody>
+          <a:bodyPr wrap="square">
+            <a:spAutoFit/>
+          </a:bodyPr>
+          <a:lstStyle/>
+          <a:p>
+            <a:r>
+              <a:rPr sz="1100" b="0" i="0">
                 <a:solidFill>
                   <a:srgbClr val="1F2A44"/>
                 </a:solidFill>
@@ -7241,7 +7273,7 @@
                   <a:srgbClr val="1F2A44"/>
                 </a:solidFill>
               </a:rPr>
-              <a:t>BI handoff — from star to self-service</a:t>
+              <a:t>Testing strategy — 77 tests, tiered severity</a:t>
             </a:r>
           </a:p>
         </p:txBody>
@@ -7289,137 +7321,469 @@
           </a:p>
         </p:txBody>
       </p:sp>
-      <p:sp>
-        <p:nvSpPr>
-          <p:cNvPr id="4" name="TextBox 3"/>
-          <p:cNvSpPr txBox="1"/>
+      <p:graphicFrame>
+        <p:nvGraphicFramePr>
+          <p:cNvPr id="4" name="Table 3"/>
+          <p:cNvGraphicFramePr>
+            <a:graphicFrameLocks noGrp="1"/>
+          </p:cNvGraphicFramePr>
           <p:nvPr/>
-        </p:nvSpPr>
-        <p:spPr>
-          <a:xfrm>
-            <a:off x="548640" y="1371600"/>
-            <a:ext cx="11064240" cy="5303520"/>
-          </a:xfrm>
-          <a:prstGeom prst="rect">
-            <a:avLst/>
-          </a:prstGeom>
-          <a:noFill/>
-        </p:spPr>
-        <p:txBody>
-          <a:bodyPr wrap="square">
-            <a:spAutoFit/>
-          </a:bodyPr>
-          <a:lstStyle/>
-          <a:p>
-            <a:pPr>
-              <a:spcAft>
-                <a:spcPts val="400"/>
-              </a:spcAft>
-            </a:pPr>
-            <a:r>
-              <a:rPr sz="1500">
-                <a:solidFill>
-                  <a:srgbClr val="1F2A44"/>
-                </a:solidFill>
-              </a:rPr>
-              <a:t>• Every chart in the previous slide is a single SELECT with visible joins to the star.</a:t>
-            </a:r>
-          </a:p>
-          <a:p>
-            <a:pPr>
-              <a:spcAft>
-                <a:spcPts val="400"/>
-              </a:spcAft>
-            </a:pPr>
-            <a:r>
-              <a:rPr sz="1500">
-                <a:solidFill>
-                  <a:srgbClr val="1F2A44"/>
-                </a:solidFill>
-              </a:rPr>
-              <a:t>• In production those queries move to a **semantic layer** — Looker LookML, dbt Semantic Layer, Cube, Metabase Models.</a:t>
-            </a:r>
-          </a:p>
-          <a:p>
-            <a:pPr>
-              <a:spcAft>
-                <a:spcPts val="400"/>
-              </a:spcAft>
-            </a:pPr>
-            <a:r>
-              <a:rPr sz="1500">
-                <a:solidFill>
-                  <a:srgbClr val="1F2A44"/>
-                </a:solidFill>
-              </a:rPr>
-              <a:t>• Business users then pick dimensions + measures to build dashboards, no SQL required.</a:t>
-            </a:r>
-          </a:p>
-          <a:p>
-            <a:pPr>
-              <a:spcAft>
-                <a:spcPts val="400"/>
-              </a:spcAft>
-            </a:pPr>
-            <a:r>
-              <a:rPr sz="1500">
-                <a:solidFill>
-                  <a:srgbClr val="1F2A44"/>
-                </a:solidFill>
-              </a:rPr>
-              <a:t>• Aggregation consistency (revenue_amount not amount) is enforced once in the layer, not repeated in every chart.</a:t>
-            </a:r>
-          </a:p>
-          <a:p>
-            <a:pPr>
-              <a:spcAft>
-                <a:spcPts val="400"/>
-              </a:spcAft>
-            </a:pPr>
-            <a:r>
-              <a:rPr sz="1500">
-                <a:solidFill>
-                  <a:srgbClr val="1F2A44"/>
-                </a:solidFill>
-              </a:rPr>
-              <a:t>• Dashboards can be added / changed by non-engineers, dev cycle drops from PR to point-and-click.</a:t>
-            </a:r>
-          </a:p>
-        </p:txBody>
-      </p:sp>
-      <p:sp>
-        <p:nvSpPr>
-          <p:cNvPr id="5" name="TextBox 4"/>
-          <p:cNvSpPr txBox="1"/>
-          <p:nvPr/>
-        </p:nvSpPr>
-        <p:spPr>
-          <a:xfrm>
-            <a:off x="548640" y="5943600"/>
-            <a:ext cx="10972800" cy="365760"/>
-          </a:xfrm>
-          <a:prstGeom prst="rect">
-            <a:avLst/>
-          </a:prstGeom>
-          <a:noFill/>
-        </p:spPr>
-        <p:txBody>
-          <a:bodyPr wrap="square">
-            <a:spAutoFit/>
-          </a:bodyPr>
-          <a:lstStyle/>
-          <a:p>
-            <a:r>
-              <a:rPr sz="1300" b="0" i="1">
-                <a:solidFill>
-                  <a:srgbClr val="6C757D"/>
-                </a:solidFill>
-              </a:rPr>
-              <a:t>Semantic-layer adoption is a Phase-10 item in FUTURE_IMPROVEMENTS.md.</a:t>
-            </a:r>
-          </a:p>
-        </p:txBody>
-      </p:sp>
+        </p:nvGraphicFramePr>
+        <p:xfrm>
+          <a:off x="548640" y="1280160"/>
+          <a:ext cx="11064240" cy="2551176"/>
+        </p:xfrm>
+        <a:graphic>
+          <a:graphicData uri="http://schemas.openxmlformats.org/drawingml/2006/table">
+            <a:tbl>
+              <a:tblPr firstRow="1" bandRow="1">
+                <a:tableStyleId>{5C22544A-7EE6-4342-B048-85BDC9FD1C3A}</a:tableStyleId>
+              </a:tblPr>
+              <a:tblGrid>
+                <a:gridCol w="3200400"/>
+                <a:gridCol w="2743200"/>
+                <a:gridCol w="5120640"/>
+              </a:tblGrid>
+              <a:tr h="318897">
+                <a:tc>
+                  <a:txBody>
+                    <a:bodyPr/>
+                    <a:lstStyle/>
+                    <a:p>
+                      <a:r>
+                        <a:rPr sz="1300" b="1">
+                          <a:solidFill>
+                            <a:srgbClr val="FFFFFF"/>
+                          </a:solidFill>
+                        </a:rPr>
+                        <a:t>Layer</a:t>
+                      </a:r>
+                    </a:p>
+                  </a:txBody>
+                  <a:tcPr>
+                    <a:solidFill>
+                      <a:srgbClr val="1F2A44"/>
+                    </a:solidFill>
+                  </a:tcPr>
+                </a:tc>
+                <a:tc>
+                  <a:txBody>
+                    <a:bodyPr/>
+                    <a:lstStyle/>
+                    <a:p>
+                      <a:r>
+                        <a:rPr sz="1300" b="1">
+                          <a:solidFill>
+                            <a:srgbClr val="FFFFFF"/>
+                          </a:solidFill>
+                        </a:rPr>
+                        <a:t>Test count</a:t>
+                      </a:r>
+                    </a:p>
+                  </a:txBody>
+                  <a:tcPr>
+                    <a:solidFill>
+                      <a:srgbClr val="1F2A44"/>
+                    </a:solidFill>
+                  </a:tcPr>
+                </a:tc>
+                <a:tc>
+                  <a:txBody>
+                    <a:bodyPr/>
+                    <a:lstStyle/>
+                    <a:p>
+                      <a:r>
+                        <a:rPr sz="1300" b="1">
+                          <a:solidFill>
+                            <a:srgbClr val="FFFFFF"/>
+                          </a:solidFill>
+                        </a:rPr>
+                        <a:t>Catches</a:t>
+                      </a:r>
+                    </a:p>
+                  </a:txBody>
+                  <a:tcPr>
+                    <a:solidFill>
+                      <a:srgbClr val="1F2A44"/>
+                    </a:solidFill>
+                  </a:tcPr>
+                </a:tc>
+              </a:tr>
+              <a:tr h="318897">
+                <a:tc>
+                  <a:txBody>
+                    <a:bodyPr/>
+                    <a:lstStyle/>
+                    <a:p>
+                      <a:r>
+                        <a:rPr sz="1100">
+                          <a:solidFill>
+                            <a:srgbClr val="1F2A44"/>
+                          </a:solidFill>
+                        </a:rPr>
+                        <a:t>Source integrity</a:t>
+                      </a:r>
+                    </a:p>
+                  </a:txBody>
+                  <a:tcPr/>
+                </a:tc>
+                <a:tc>
+                  <a:txBody>
+                    <a:bodyPr/>
+                    <a:lstStyle/>
+                    <a:p>
+                      <a:r>
+                        <a:rPr sz="1100">
+                          <a:solidFill>
+                            <a:srgbClr val="1F2A44"/>
+                          </a:solidFill>
+                        </a:rPr>
+                        <a:t>1 (source freshness — off, static CSV)</a:t>
+                      </a:r>
+                    </a:p>
+                  </a:txBody>
+                  <a:tcPr/>
+                </a:tc>
+                <a:tc>
+                  <a:txBody>
+                    <a:bodyPr/>
+                    <a:lstStyle/>
+                    <a:p>
+                      <a:r>
+                        <a:rPr sz="1100">
+                          <a:solidFill>
+                            <a:srgbClr val="1F2A44"/>
+                          </a:solidFill>
+                        </a:rPr>
+                        <a:t>Missing source table</a:t>
+                      </a:r>
+                    </a:p>
+                  </a:txBody>
+                  <a:tcPr/>
+                </a:tc>
+              </a:tr>
+              <a:tr h="318897">
+                <a:tc>
+                  <a:txBody>
+                    <a:bodyPr/>
+                    <a:lstStyle/>
+                    <a:p>
+                      <a:r>
+                        <a:rPr sz="1100">
+                          <a:solidFill>
+                            <a:srgbClr val="1F2A44"/>
+                          </a:solidFill>
+                        </a:rPr>
+                        <a:t>Staging column contracts</a:t>
+                      </a:r>
+                    </a:p>
+                  </a:txBody>
+                  <a:tcPr/>
+                </a:tc>
+                <a:tc>
+                  <a:txBody>
+                    <a:bodyPr/>
+                    <a:lstStyle/>
+                    <a:p>
+                      <a:r>
+                        <a:rPr sz="1100">
+                          <a:solidFill>
+                            <a:srgbClr val="1F2A44"/>
+                          </a:solidFill>
+                        </a:rPr>
+                        <a:t>11 (schema.yml)</a:t>
+                      </a:r>
+                    </a:p>
+                  </a:txBody>
+                  <a:tcPr/>
+                </a:tc>
+                <a:tc>
+                  <a:txBody>
+                    <a:bodyPr/>
+                    <a:lstStyle/>
+                    <a:p>
+                      <a:r>
+                        <a:rPr sz="1100">
+                          <a:solidFill>
+                            <a:srgbClr val="1F2A44"/>
+                          </a:solidFill>
+                        </a:rPr>
+                        <a:t>Type violations, NULL PKs, unknown statuses</a:t>
+                      </a:r>
+                    </a:p>
+                  </a:txBody>
+                  <a:tcPr/>
+                </a:tc>
+              </a:tr>
+              <a:tr h="318897">
+                <a:tc>
+                  <a:txBody>
+                    <a:bodyPr/>
+                    <a:lstStyle/>
+                    <a:p>
+                      <a:r>
+                        <a:rPr sz="1100">
+                          <a:solidFill>
+                            <a:srgbClr val="1F2A44"/>
+                          </a:solidFill>
+                        </a:rPr>
+                        <a:t>Staging shape</a:t>
+                      </a:r>
+                    </a:p>
+                  </a:txBody>
+                  <a:tcPr/>
+                </a:tc>
+                <a:tc>
+                  <a:txBody>
+                    <a:bodyPr/>
+                    <a:lstStyle/>
+                    <a:p>
+                      <a:r>
+                        <a:rPr sz="1100">
+                          <a:solidFill>
+                            <a:srgbClr val="1F2A44"/>
+                          </a:solidFill>
+                        </a:rPr>
+                        <a:t>2 singular</a:t>
+                      </a:r>
+                    </a:p>
+                  </a:txBody>
+                  <a:tcPr/>
+                </a:tc>
+                <a:tc>
+                  <a:txBody>
+                    <a:bodyPr/>
+                    <a:lstStyle/>
+                    <a:p>
+                      <a:r>
+                        <a:rPr sz="1100">
+                          <a:solidFill>
+                            <a:srgbClr val="1F2A44"/>
+                          </a:solidFill>
+                        </a:rPr>
+                        <a:t>Raw→stg row-count · Status/Courier drift</a:t>
+                      </a:r>
+                    </a:p>
+                  </a:txBody>
+                  <a:tcPr/>
+                </a:tc>
+              </a:tr>
+              <a:tr h="318897">
+                <a:tc>
+                  <a:txBody>
+                    <a:bodyPr/>
+                    <a:lstStyle/>
+                    <a:p>
+                      <a:r>
+                        <a:rPr sz="1100">
+                          <a:solidFill>
+                            <a:srgbClr val="1F2A44"/>
+                          </a:solidFill>
+                        </a:rPr>
+                        <a:t>Dimension integrity</a:t>
+                      </a:r>
+                    </a:p>
+                  </a:txBody>
+                  <a:tcPr/>
+                </a:tc>
+                <a:tc>
+                  <a:txBody>
+                    <a:bodyPr/>
+                    <a:lstStyle/>
+                    <a:p>
+                      <a:r>
+                        <a:rPr sz="1100">
+                          <a:solidFill>
+                            <a:srgbClr val="1F2A44"/>
+                          </a:solidFill>
+                        </a:rPr>
+                        <a:t>40 (schema.yml)</a:t>
+                      </a:r>
+                    </a:p>
+                  </a:txBody>
+                  <a:tcPr/>
+                </a:tc>
+                <a:tc>
+                  <a:txBody>
+                    <a:bodyPr/>
+                    <a:lstStyle/>
+                    <a:p>
+                      <a:r>
+                        <a:rPr sz="1100">
+                          <a:solidFill>
+                            <a:srgbClr val="1F2A44"/>
+                          </a:solidFill>
+                        </a:rPr>
+                        <a:t>Non-unique keys, NULL attributes, unexpected values</a:t>
+                      </a:r>
+                    </a:p>
+                  </a:txBody>
+                  <a:tcPr/>
+                </a:tc>
+              </a:tr>
+              <a:tr h="318897">
+                <a:tc>
+                  <a:txBody>
+                    <a:bodyPr/>
+                    <a:lstStyle/>
+                    <a:p>
+                      <a:r>
+                        <a:rPr sz="1100">
+                          <a:solidFill>
+                            <a:srgbClr val="1F2A44"/>
+                          </a:solidFill>
+                        </a:rPr>
+                        <a:t>Fact FK integrity</a:t>
+                      </a:r>
+                    </a:p>
+                  </a:txBody>
+                  <a:tcPr/>
+                </a:tc>
+                <a:tc>
+                  <a:txBody>
+                    <a:bodyPr/>
+                    <a:lstStyle/>
+                    <a:p>
+                      <a:r>
+                        <a:rPr sz="1100">
+                          <a:solidFill>
+                            <a:srgbClr val="1F2A44"/>
+                          </a:solidFill>
+                        </a:rPr>
+                        <a:t>4 relationships</a:t>
+                      </a:r>
+                    </a:p>
+                  </a:txBody>
+                  <a:tcPr/>
+                </a:tc>
+                <a:tc>
+                  <a:txBody>
+                    <a:bodyPr/>
+                    <a:lstStyle/>
+                    <a:p>
+                      <a:r>
+                        <a:rPr sz="1100">
+                          <a:solidFill>
+                            <a:srgbClr val="1F2A44"/>
+                          </a:solidFill>
+                        </a:rPr>
+                        <a:t>Orphan FK values pointing to non-existent dim rows</a:t>
+                      </a:r>
+                    </a:p>
+                  </a:txBody>
+                  <a:tcPr/>
+                </a:tc>
+              </a:tr>
+              <a:tr h="318897">
+                <a:tc>
+                  <a:txBody>
+                    <a:bodyPr/>
+                    <a:lstStyle/>
+                    <a:p>
+                      <a:r>
+                        <a:rPr sz="1100">
+                          <a:solidFill>
+                            <a:srgbClr val="1F2A44"/>
+                          </a:solidFill>
+                        </a:rPr>
+                        <a:t>Fact column contracts</a:t>
+                      </a:r>
+                    </a:p>
+                  </a:txBody>
+                  <a:tcPr/>
+                </a:tc>
+                <a:tc>
+                  <a:txBody>
+                    <a:bodyPr/>
+                    <a:lstStyle/>
+                    <a:p>
+                      <a:r>
+                        <a:rPr sz="1100">
+                          <a:solidFill>
+                            <a:srgbClr val="1F2A44"/>
+                          </a:solidFill>
+                        </a:rPr>
+                        <a:t>14 (schema.yml)</a:t>
+                      </a:r>
+                    </a:p>
+                  </a:txBody>
+                  <a:tcPr/>
+                </a:tc>
+                <a:tc>
+                  <a:txBody>
+                    <a:bodyPr/>
+                    <a:lstStyle/>
+                    <a:p>
+                      <a:r>
+                        <a:rPr sz="1100">
+                          <a:solidFill>
+                            <a:srgbClr val="1F2A44"/>
+                          </a:solidFill>
+                        </a:rPr>
+                        <a:t>NULL keys/measures, non-unique PK</a:t>
+                      </a:r>
+                    </a:p>
+                  </a:txBody>
+                  <a:tcPr/>
+                </a:tc>
+              </a:tr>
+              <a:tr h="318897">
+                <a:tc>
+                  <a:txBody>
+                    <a:bodyPr/>
+                    <a:lstStyle/>
+                    <a:p>
+                      <a:r>
+                        <a:rPr sz="1100">
+                          <a:solidFill>
+                            <a:srgbClr val="1F2A44"/>
+                          </a:solidFill>
+                        </a:rPr>
+                        <a:t>End-to-end business rules</a:t>
+                      </a:r>
+                    </a:p>
+                  </a:txBody>
+                  <a:tcPr/>
+                </a:tc>
+                <a:tc>
+                  <a:txBody>
+                    <a:bodyPr/>
+                    <a:lstStyle/>
+                    <a:p>
+                      <a:r>
+                        <a:rPr sz="1100">
+                          <a:solidFill>
+                            <a:srgbClr val="1F2A44"/>
+                          </a:solidFill>
+                        </a:rPr>
+                        <a:t>5 singular (assert_*)</a:t>
+                      </a:r>
+                    </a:p>
+                  </a:txBody>
+                  <a:tcPr/>
+                </a:tc>
+                <a:tc>
+                  <a:txBody>
+                    <a:bodyPr/>
+                    <a:lstStyle/>
+                    <a:p>
+                      <a:r>
+                        <a:rPr sz="1100">
+                          <a:solidFill>
+                            <a:srgbClr val="1F2A44"/>
+                          </a:solidFill>
+                        </a:rPr>
+                        <a:t>D1 revenue accounting, D5 is_terminal, D3 promo, etc.</a:t>
+                      </a:r>
+                    </a:p>
+                  </a:txBody>
+                  <a:tcPr/>
+                </a:tc>
+              </a:tr>
+            </a:tbl>
+          </a:graphicData>
+        </a:graphic>
+      </p:graphicFrame>
     </p:spTree>
   </p:cSld>
   <p:clrMapOvr>
@@ -7474,7 +7838,7 @@
                   <a:srgbClr val="1F2A44"/>
                 </a:solidFill>
               </a:rPr>
-              <a:t>Testing strategy — 77 tests, tiered severity</a:t>
+              <a:t>Interesting test choices</a:t>
             </a:r>
           </a:p>
         </p:txBody>
@@ -7532,7 +7896,7 @@
         </p:nvGraphicFramePr>
         <p:xfrm>
           <a:off x="548640" y="1280160"/>
-          <a:ext cx="11064240" cy="2551176"/>
+          <a:ext cx="11064240" cy="1380744"/>
         </p:xfrm>
         <a:graphic>
           <a:graphicData uri="http://schemas.openxmlformats.org/drawingml/2006/table">
@@ -7541,11 +7905,11 @@
                 <a:tableStyleId>{5C22544A-7EE6-4342-B048-85BDC9FD1C3A}</a:tableStyleId>
               </a:tblPr>
               <a:tblGrid>
+                <a:gridCol w="3657600"/>
                 <a:gridCol w="3200400"/>
-                <a:gridCol w="2743200"/>
-                <a:gridCol w="5120640"/>
+                <a:gridCol w="4206240"/>
               </a:tblGrid>
-              <a:tr h="318897">
+              <a:tr h="345186">
                 <a:tc>
                   <a:txBody>
                     <a:bodyPr/>
@@ -7557,7 +7921,7 @@
                             <a:srgbClr val="FFFFFF"/>
                           </a:solidFill>
                         </a:rPr>
-                        <a:t>Layer</a:t>
+                        <a:t>Test</a:t>
                       </a:r>
                     </a:p>
                   </a:txBody>
@@ -7578,7 +7942,7 @@
                             <a:srgbClr val="FFFFFF"/>
                           </a:solidFill>
                         </a:rPr>
-                        <a:t>Test count</a:t>
+                        <a:t>Threshold</a:t>
                       </a:r>
                     </a:p>
                   </a:txBody>
@@ -7599,7 +7963,7 @@
                             <a:srgbClr val="FFFFFF"/>
                           </a:solidFill>
                         </a:rPr>
-                        <a:t>Catches</a:t>
+                        <a:t>Protects</a:t>
                       </a:r>
                     </a:p>
                   </a:txBody>
@@ -7610,371 +7974,159 @@
                   </a:tcPr>
                 </a:tc>
               </a:tr>
-              <a:tr h="318897">
-                <a:tc>
-                  <a:txBody>
-                    <a:bodyPr/>
-                    <a:lstStyle/>
-                    <a:p>
-                      <a:r>
-                        <a:rPr sz="1100">
-                          <a:solidFill>
-                            <a:srgbClr val="1F2A44"/>
-                          </a:solidFill>
-                        </a:rPr>
-                        <a:t>Source integrity</a:t>
-                      </a:r>
-                    </a:p>
-                  </a:txBody>
-                  <a:tcPr/>
-                </a:tc>
-                <a:tc>
-                  <a:txBody>
-                    <a:bodyPr/>
-                    <a:lstStyle/>
-                    <a:p>
-                      <a:r>
-                        <a:rPr sz="1100">
-                          <a:solidFill>
-                            <a:srgbClr val="1F2A44"/>
-                          </a:solidFill>
-                        </a:rPr>
-                        <a:t>1 (source freshness — off, static CSV)</a:t>
-                      </a:r>
-                    </a:p>
-                  </a:txBody>
-                  <a:tcPr/>
-                </a:tc>
-                <a:tc>
-                  <a:txBody>
-                    <a:bodyPr/>
-                    <a:lstStyle/>
-                    <a:p>
-                      <a:r>
-                        <a:rPr sz="1100">
-                          <a:solidFill>
-                            <a:srgbClr val="1F2A44"/>
-                          </a:solidFill>
-                        </a:rPr>
-                        <a:t>Missing source table</a:t>
+              <a:tr h="345186">
+                <a:tc>
+                  <a:txBody>
+                    <a:bodyPr/>
+                    <a:lstStyle/>
+                    <a:p>
+                      <a:r>
+                        <a:rPr sz="1100">
+                          <a:solidFill>
+                            <a:srgbClr val="1F2A44"/>
+                          </a:solidFill>
+                        </a:rPr>
+                        <a:t>status_courier_contradictions</a:t>
+                      </a:r>
+                    </a:p>
+                  </a:txBody>
+                  <a:tcPr/>
+                </a:tc>
+                <a:tc>
+                  <a:txBody>
+                    <a:bodyPr/>
+                    <a:lstStyle/>
+                    <a:p>
+                      <a:r>
+                        <a:rPr sz="1100">
+                          <a:solidFill>
+                            <a:srgbClr val="1F2A44"/>
+                          </a:solidFill>
+                        </a:rPr>
+                        <a:t>WARN &gt;250 · ERROR &gt;1000  (today: 218)</a:t>
+                      </a:r>
+                    </a:p>
+                  </a:txBody>
+                  <a:tcPr/>
+                </a:tc>
+                <a:tc>
+                  <a:txBody>
+                    <a:bodyPr/>
+                    <a:lstStyle/>
+                    <a:p>
+                      <a:r>
+                        <a:rPr sz="1100">
+                          <a:solidFill>
+                            <a:srgbClr val="1F2A44"/>
+                          </a:solidFill>
+                        </a:rPr>
+                        <a:t>D6 — surface real data-quality drift rather than silently coerce.</a:t>
                       </a:r>
                     </a:p>
                   </a:txBody>
                   <a:tcPr/>
                 </a:tc>
               </a:tr>
-              <a:tr h="318897">
-                <a:tc>
-                  <a:txBody>
-                    <a:bodyPr/>
-                    <a:lstStyle/>
-                    <a:p>
-                      <a:r>
-                        <a:rPr sz="1100">
-                          <a:solidFill>
-                            <a:srgbClr val="1F2A44"/>
-                          </a:solidFill>
-                        </a:rPr>
-                        <a:t>Staging column contracts</a:t>
-                      </a:r>
-                    </a:p>
-                  </a:txBody>
-                  <a:tcPr/>
-                </a:tc>
-                <a:tc>
-                  <a:txBody>
-                    <a:bodyPr/>
-                    <a:lstStyle/>
-                    <a:p>
-                      <a:r>
-                        <a:rPr sz="1100">
-                          <a:solidFill>
-                            <a:srgbClr val="1F2A44"/>
-                          </a:solidFill>
-                        </a:rPr>
-                        <a:t>11 (schema.yml)</a:t>
-                      </a:r>
-                    </a:p>
-                  </a:txBody>
-                  <a:tcPr/>
-                </a:tc>
-                <a:tc>
-                  <a:txBody>
-                    <a:bodyPr/>
-                    <a:lstStyle/>
-                    <a:p>
-                      <a:r>
-                        <a:rPr sz="1100">
-                          <a:solidFill>
-                            <a:srgbClr val="1F2A44"/>
-                          </a:solidFill>
-                        </a:rPr>
-                        <a:t>Type violations, NULL PKs, unknown statuses</a:t>
+              <a:tr h="345186">
+                <a:tc>
+                  <a:txBody>
+                    <a:bodyPr/>
+                    <a:lstStyle/>
+                    <a:p>
+                      <a:r>
+                        <a:rPr sz="1100">
+                          <a:solidFill>
+                            <a:srgbClr val="1F2A44"/>
+                          </a:solidFill>
+                        </a:rPr>
+                        <a:t>assert_no_cancelled_with_revenue</a:t>
+                      </a:r>
+                    </a:p>
+                  </a:txBody>
+                  <a:tcPr/>
+                </a:tc>
+                <a:tc>
+                  <a:txBody>
+                    <a:bodyPr/>
+                    <a:lstStyle/>
+                    <a:p>
+                      <a:r>
+                        <a:rPr sz="1100">
+                          <a:solidFill>
+                            <a:srgbClr val="1F2A44"/>
+                          </a:solidFill>
+                        </a:rPr>
+                        <a:t>ERROR on any row (today: 0)</a:t>
+                      </a:r>
+                    </a:p>
+                  </a:txBody>
+                  <a:tcPr/>
+                </a:tc>
+                <a:tc>
+                  <a:txBody>
+                    <a:bodyPr/>
+                    <a:lstStyle/>
+                    <a:p>
+                      <a:r>
+                        <a:rPr sz="1100">
+                          <a:solidFill>
+                            <a:srgbClr val="1F2A44"/>
+                          </a:solidFill>
+                        </a:rPr>
+                        <a:t>D1 — the derivation contract. Fails immediately if revenue_amount stops zeroing for cancelled.</a:t>
                       </a:r>
                     </a:p>
                   </a:txBody>
                   <a:tcPr/>
                 </a:tc>
               </a:tr>
-              <a:tr h="318897">
-                <a:tc>
-                  <a:txBody>
-                    <a:bodyPr/>
-                    <a:lstStyle/>
-                    <a:p>
-                      <a:r>
-                        <a:rPr sz="1100">
-                          <a:solidFill>
-                            <a:srgbClr val="1F2A44"/>
-                          </a:solidFill>
-                        </a:rPr>
-                        <a:t>Staging shape</a:t>
-                      </a:r>
-                    </a:p>
-                  </a:txBody>
-                  <a:tcPr/>
-                </a:tc>
-                <a:tc>
-                  <a:txBody>
-                    <a:bodyPr/>
-                    <a:lstStyle/>
-                    <a:p>
-                      <a:r>
-                        <a:rPr sz="1100">
-                          <a:solidFill>
-                            <a:srgbClr val="1F2A44"/>
-                          </a:solidFill>
-                        </a:rPr>
-                        <a:t>2 singular</a:t>
-                      </a:r>
-                    </a:p>
-                  </a:txBody>
-                  <a:tcPr/>
-                </a:tc>
-                <a:tc>
-                  <a:txBody>
-                    <a:bodyPr/>
-                    <a:lstStyle/>
-                    <a:p>
-                      <a:r>
-                        <a:rPr sz="1100">
-                          <a:solidFill>
-                            <a:srgbClr val="1F2A44"/>
-                          </a:solidFill>
-                        </a:rPr>
-                        <a:t>Raw→stg row-count · Status/Courier drift</a:t>
-                      </a:r>
-                    </a:p>
-                  </a:txBody>
-                  <a:tcPr/>
-                </a:tc>
-              </a:tr>
-              <a:tr h="318897">
-                <a:tc>
-                  <a:txBody>
-                    <a:bodyPr/>
-                    <a:lstStyle/>
-                    <a:p>
-                      <a:r>
-                        <a:rPr sz="1100">
-                          <a:solidFill>
-                            <a:srgbClr val="1F2A44"/>
-                          </a:solidFill>
-                        </a:rPr>
-                        <a:t>Dimension integrity</a:t>
-                      </a:r>
-                    </a:p>
-                  </a:txBody>
-                  <a:tcPr/>
-                </a:tc>
-                <a:tc>
-                  <a:txBody>
-                    <a:bodyPr/>
-                    <a:lstStyle/>
-                    <a:p>
-                      <a:r>
-                        <a:rPr sz="1100">
-                          <a:solidFill>
-                            <a:srgbClr val="1F2A44"/>
-                          </a:solidFill>
-                        </a:rPr>
-                        <a:t>40 (schema.yml)</a:t>
-                      </a:r>
-                    </a:p>
-                  </a:txBody>
-                  <a:tcPr/>
-                </a:tc>
-                <a:tc>
-                  <a:txBody>
-                    <a:bodyPr/>
-                    <a:lstStyle/>
-                    <a:p>
-                      <a:r>
-                        <a:rPr sz="1100">
-                          <a:solidFill>
-                            <a:srgbClr val="1F2A44"/>
-                          </a:solidFill>
-                        </a:rPr>
-                        <a:t>Non-unique keys, NULL attributes, unexpected values</a:t>
-                      </a:r>
-                    </a:p>
-                  </a:txBody>
-                  <a:tcPr/>
-                </a:tc>
-              </a:tr>
-              <a:tr h="318897">
-                <a:tc>
-                  <a:txBody>
-                    <a:bodyPr/>
-                    <a:lstStyle/>
-                    <a:p>
-                      <a:r>
-                        <a:rPr sz="1100">
-                          <a:solidFill>
-                            <a:srgbClr val="1F2A44"/>
-                          </a:solidFill>
-                        </a:rPr>
-                        <a:t>Fact FK integrity</a:t>
-                      </a:r>
-                    </a:p>
-                  </a:txBody>
-                  <a:tcPr/>
-                </a:tc>
-                <a:tc>
-                  <a:txBody>
-                    <a:bodyPr/>
-                    <a:lstStyle/>
-                    <a:p>
-                      <a:r>
-                        <a:rPr sz="1100">
-                          <a:solidFill>
-                            <a:srgbClr val="1F2A44"/>
-                          </a:solidFill>
-                        </a:rPr>
-                        <a:t>4 relationships</a:t>
-                      </a:r>
-                    </a:p>
-                  </a:txBody>
-                  <a:tcPr/>
-                </a:tc>
-                <a:tc>
-                  <a:txBody>
-                    <a:bodyPr/>
-                    <a:lstStyle/>
-                    <a:p>
-                      <a:r>
-                        <a:rPr sz="1100">
-                          <a:solidFill>
-                            <a:srgbClr val="1F2A44"/>
-                          </a:solidFill>
-                        </a:rPr>
-                        <a:t>Orphan FK values pointing to non-existent dim rows</a:t>
-                      </a:r>
-                    </a:p>
-                  </a:txBody>
-                  <a:tcPr/>
-                </a:tc>
-              </a:tr>
-              <a:tr h="318897">
-                <a:tc>
-                  <a:txBody>
-                    <a:bodyPr/>
-                    <a:lstStyle/>
-                    <a:p>
-                      <a:r>
-                        <a:rPr sz="1100">
-                          <a:solidFill>
-                            <a:srgbClr val="1F2A44"/>
-                          </a:solidFill>
-                        </a:rPr>
-                        <a:t>Fact column contracts</a:t>
-                      </a:r>
-                    </a:p>
-                  </a:txBody>
-                  <a:tcPr/>
-                </a:tc>
-                <a:tc>
-                  <a:txBody>
-                    <a:bodyPr/>
-                    <a:lstStyle/>
-                    <a:p>
-                      <a:r>
-                        <a:rPr sz="1100">
-                          <a:solidFill>
-                            <a:srgbClr val="1F2A44"/>
-                          </a:solidFill>
-                        </a:rPr>
-                        <a:t>14 (schema.yml)</a:t>
-                      </a:r>
-                    </a:p>
-                  </a:txBody>
-                  <a:tcPr/>
-                </a:tc>
-                <a:tc>
-                  <a:txBody>
-                    <a:bodyPr/>
-                    <a:lstStyle/>
-                    <a:p>
-                      <a:r>
-                        <a:rPr sz="1100">
-                          <a:solidFill>
-                            <a:srgbClr val="1F2A44"/>
-                          </a:solidFill>
-                        </a:rPr>
-                        <a:t>NULL keys/measures, non-unique PK</a:t>
-                      </a:r>
-                    </a:p>
-                  </a:txBody>
-                  <a:tcPr/>
-                </a:tc>
-              </a:tr>
-              <a:tr h="318897">
-                <a:tc>
-                  <a:txBody>
-                    <a:bodyPr/>
-                    <a:lstStyle/>
-                    <a:p>
-                      <a:r>
-                        <a:rPr sz="1100">
-                          <a:solidFill>
-                            <a:srgbClr val="1F2A44"/>
-                          </a:solidFill>
-                        </a:rPr>
-                        <a:t>End-to-end business rules</a:t>
-                      </a:r>
-                    </a:p>
-                  </a:txBody>
-                  <a:tcPr/>
-                </a:tc>
-                <a:tc>
-                  <a:txBody>
-                    <a:bodyPr/>
-                    <a:lstStyle/>
-                    <a:p>
-                      <a:r>
-                        <a:rPr sz="1100">
-                          <a:solidFill>
-                            <a:srgbClr val="1F2A44"/>
-                          </a:solidFill>
-                        </a:rPr>
-                        <a:t>5 singular (assert_*)</a:t>
-                      </a:r>
-                    </a:p>
-                  </a:txBody>
-                  <a:tcPr/>
-                </a:tc>
-                <a:tc>
-                  <a:txBody>
-                    <a:bodyPr/>
-                    <a:lstStyle/>
-                    <a:p>
-                      <a:r>
-                        <a:rPr sz="1100">
-                          <a:solidFill>
-                            <a:srgbClr val="1F2A44"/>
-                          </a:solidFill>
-                        </a:rPr>
-                        <a:t>D1 revenue accounting, D5 is_terminal, D3 promo, etc.</a:t>
+              <a:tr h="345186">
+                <a:tc>
+                  <a:txBody>
+                    <a:bodyPr/>
+                    <a:lstStyle/>
+                    <a:p>
+                      <a:r>
+                        <a:rPr sz="1100">
+                          <a:solidFill>
+                            <a:srgbClr val="1F2A44"/>
+                          </a:solidFill>
+                        </a:rPr>
+                        <a:t>assert_fact_unknown_region_rate</a:t>
+                      </a:r>
+                    </a:p>
+                  </a:txBody>
+                  <a:tcPr/>
+                </a:tc>
+                <a:tc>
+                  <a:txBody>
+                    <a:bodyPr/>
+                    <a:lstStyle/>
+                    <a:p>
+                      <a:r>
+                        <a:rPr sz="1100">
+                          <a:solidFill>
+                            <a:srgbClr val="1F2A44"/>
+                          </a:solidFill>
+                        </a:rPr>
+                        <a:t>WARN &gt;3,000 · ERROR &gt;10,000  (today: 1,160)</a:t>
+                      </a:r>
+                    </a:p>
+                  </a:txBody>
+                  <a:tcPr/>
+                </a:tc>
+                <a:tc>
+                  <a:txBody>
+                    <a:bodyPr/>
+                    <a:lstStyle/>
+                    <a:p>
+                      <a:r>
+                        <a:rPr sz="1100">
+                          <a:solidFill>
+                            <a:srgbClr val="1F2A44"/>
+                          </a:solidFill>
+                        </a:rPr>
+                        <a:t>Geography seed health — degradation of state-name coverage.</a:t>
                       </a:r>
                     </a:p>
                   </a:txBody>
@@ -7985,59 +8137,6 @@
           </a:graphicData>
         </a:graphic>
       </p:graphicFrame>
-      <p:sp>
-        <p:nvSpPr>
-          <p:cNvPr id="5" name="TextBox 4"/>
-          <p:cNvSpPr txBox="1"/>
-          <p:nvPr/>
-        </p:nvSpPr>
-        <p:spPr>
-          <a:xfrm>
-            <a:off x="548640" y="5120640"/>
-            <a:ext cx="11064240" cy="1554480"/>
-          </a:xfrm>
-          <a:prstGeom prst="rect">
-            <a:avLst/>
-          </a:prstGeom>
-          <a:noFill/>
-        </p:spPr>
-        <p:txBody>
-          <a:bodyPr wrap="square">
-            <a:spAutoFit/>
-          </a:bodyPr>
-          <a:lstStyle/>
-          <a:p>
-            <a:pPr>
-              <a:spcAft>
-                <a:spcPts val="400"/>
-              </a:spcAft>
-            </a:pPr>
-            <a:r>
-              <a:rPr sz="1300">
-                <a:solidFill>
-                  <a:srgbClr val="1F2A44"/>
-                </a:solidFill>
-              </a:rPr>
-              <a:t>• **Tiered severity** on drift-prone tests (`status_courier_contradictions`, `assert_fact_unknown_region_rate`): default severity 'error' so both `warn_if` and `error_if` actually fire — a subtle dbt gotcha.</a:t>
-            </a:r>
-          </a:p>
-          <a:p>
-            <a:pPr>
-              <a:spcAft>
-                <a:spcPts val="400"/>
-              </a:spcAft>
-            </a:pPr>
-            <a:r>
-              <a:rPr sz="1300">
-                <a:solidFill>
-                  <a:srgbClr val="1F2A44"/>
-                </a:solidFill>
-              </a:rPr>
-              <a:t>• **Singular tests named `assert_&lt;invariant&gt;.sql`** — the file name reads as what should be true.</a:t>
-            </a:r>
-          </a:p>
-        </p:txBody>
-      </p:sp>
     </p:spTree>
   </p:cSld>
   <p:clrMapOvr>
@@ -8401,7 +8500,7 @@
                   <a:srgbClr val="1F2A44"/>
                 </a:solidFill>
               </a:rPr>
-              <a:t>Interesting test choices</a:t>
+              <a:t>What I'd add for production</a:t>
             </a:r>
           </a:p>
         </p:txBody>
@@ -8449,267 +8548,16 @@
           </a:p>
         </p:txBody>
       </p:sp>
-      <p:graphicFrame>
-        <p:nvGraphicFramePr>
-          <p:cNvPr id="4" name="Table 3"/>
-          <p:cNvGraphicFramePr>
-            <a:graphicFrameLocks noGrp="1"/>
-          </p:cNvGraphicFramePr>
-          <p:nvPr/>
-        </p:nvGraphicFramePr>
-        <p:xfrm>
-          <a:off x="548640" y="1280160"/>
-          <a:ext cx="11064240" cy="1380744"/>
-        </p:xfrm>
-        <a:graphic>
-          <a:graphicData uri="http://schemas.openxmlformats.org/drawingml/2006/table">
-            <a:tbl>
-              <a:tblPr firstRow="1" bandRow="1">
-                <a:tableStyleId>{5C22544A-7EE6-4342-B048-85BDC9FD1C3A}</a:tableStyleId>
-              </a:tblPr>
-              <a:tblGrid>
-                <a:gridCol w="3657600"/>
-                <a:gridCol w="3200400"/>
-                <a:gridCol w="4206240"/>
-              </a:tblGrid>
-              <a:tr h="345186">
-                <a:tc>
-                  <a:txBody>
-                    <a:bodyPr/>
-                    <a:lstStyle/>
-                    <a:p>
-                      <a:r>
-                        <a:rPr sz="1300" b="1">
-                          <a:solidFill>
-                            <a:srgbClr val="FFFFFF"/>
-                          </a:solidFill>
-                        </a:rPr>
-                        <a:t>Test</a:t>
-                      </a:r>
-                    </a:p>
-                  </a:txBody>
-                  <a:tcPr>
-                    <a:solidFill>
-                      <a:srgbClr val="1F2A44"/>
-                    </a:solidFill>
-                  </a:tcPr>
-                </a:tc>
-                <a:tc>
-                  <a:txBody>
-                    <a:bodyPr/>
-                    <a:lstStyle/>
-                    <a:p>
-                      <a:r>
-                        <a:rPr sz="1300" b="1">
-                          <a:solidFill>
-                            <a:srgbClr val="FFFFFF"/>
-                          </a:solidFill>
-                        </a:rPr>
-                        <a:t>Threshold</a:t>
-                      </a:r>
-                    </a:p>
-                  </a:txBody>
-                  <a:tcPr>
-                    <a:solidFill>
-                      <a:srgbClr val="1F2A44"/>
-                    </a:solidFill>
-                  </a:tcPr>
-                </a:tc>
-                <a:tc>
-                  <a:txBody>
-                    <a:bodyPr/>
-                    <a:lstStyle/>
-                    <a:p>
-                      <a:r>
-                        <a:rPr sz="1300" b="1">
-                          <a:solidFill>
-                            <a:srgbClr val="FFFFFF"/>
-                          </a:solidFill>
-                        </a:rPr>
-                        <a:t>Protects</a:t>
-                      </a:r>
-                    </a:p>
-                  </a:txBody>
-                  <a:tcPr>
-                    <a:solidFill>
-                      <a:srgbClr val="1F2A44"/>
-                    </a:solidFill>
-                  </a:tcPr>
-                </a:tc>
-              </a:tr>
-              <a:tr h="345186">
-                <a:tc>
-                  <a:txBody>
-                    <a:bodyPr/>
-                    <a:lstStyle/>
-                    <a:p>
-                      <a:r>
-                        <a:rPr sz="1100">
-                          <a:solidFill>
-                            <a:srgbClr val="1F2A44"/>
-                          </a:solidFill>
-                        </a:rPr>
-                        <a:t>status_courier_contradictions</a:t>
-                      </a:r>
-                    </a:p>
-                  </a:txBody>
-                  <a:tcPr/>
-                </a:tc>
-                <a:tc>
-                  <a:txBody>
-                    <a:bodyPr/>
-                    <a:lstStyle/>
-                    <a:p>
-                      <a:r>
-                        <a:rPr sz="1100">
-                          <a:solidFill>
-                            <a:srgbClr val="1F2A44"/>
-                          </a:solidFill>
-                        </a:rPr>
-                        <a:t>WARN &gt;250 · ERROR &gt;1000  (today: 218)</a:t>
-                      </a:r>
-                    </a:p>
-                  </a:txBody>
-                  <a:tcPr/>
-                </a:tc>
-                <a:tc>
-                  <a:txBody>
-                    <a:bodyPr/>
-                    <a:lstStyle/>
-                    <a:p>
-                      <a:r>
-                        <a:rPr sz="1100">
-                          <a:solidFill>
-                            <a:srgbClr val="1F2A44"/>
-                          </a:solidFill>
-                        </a:rPr>
-                        <a:t>D6 — surface real data-quality drift rather than silently coerce.</a:t>
-                      </a:r>
-                    </a:p>
-                  </a:txBody>
-                  <a:tcPr/>
-                </a:tc>
-              </a:tr>
-              <a:tr h="345186">
-                <a:tc>
-                  <a:txBody>
-                    <a:bodyPr/>
-                    <a:lstStyle/>
-                    <a:p>
-                      <a:r>
-                        <a:rPr sz="1100">
-                          <a:solidFill>
-                            <a:srgbClr val="1F2A44"/>
-                          </a:solidFill>
-                        </a:rPr>
-                        <a:t>assert_no_cancelled_with_revenue</a:t>
-                      </a:r>
-                    </a:p>
-                  </a:txBody>
-                  <a:tcPr/>
-                </a:tc>
-                <a:tc>
-                  <a:txBody>
-                    <a:bodyPr/>
-                    <a:lstStyle/>
-                    <a:p>
-                      <a:r>
-                        <a:rPr sz="1100">
-                          <a:solidFill>
-                            <a:srgbClr val="1F2A44"/>
-                          </a:solidFill>
-                        </a:rPr>
-                        <a:t>ERROR on any row (today: 0)</a:t>
-                      </a:r>
-                    </a:p>
-                  </a:txBody>
-                  <a:tcPr/>
-                </a:tc>
-                <a:tc>
-                  <a:txBody>
-                    <a:bodyPr/>
-                    <a:lstStyle/>
-                    <a:p>
-                      <a:r>
-                        <a:rPr sz="1100">
-                          <a:solidFill>
-                            <a:srgbClr val="1F2A44"/>
-                          </a:solidFill>
-                        </a:rPr>
-                        <a:t>D1 — the derivation contract. Fails immediately if revenue_amount stops zeroing for cancelled.</a:t>
-                      </a:r>
-                    </a:p>
-                  </a:txBody>
-                  <a:tcPr/>
-                </a:tc>
-              </a:tr>
-              <a:tr h="345186">
-                <a:tc>
-                  <a:txBody>
-                    <a:bodyPr/>
-                    <a:lstStyle/>
-                    <a:p>
-                      <a:r>
-                        <a:rPr sz="1100">
-                          <a:solidFill>
-                            <a:srgbClr val="1F2A44"/>
-                          </a:solidFill>
-                        </a:rPr>
-                        <a:t>assert_fact_unknown_region_rate</a:t>
-                      </a:r>
-                    </a:p>
-                  </a:txBody>
-                  <a:tcPr/>
-                </a:tc>
-                <a:tc>
-                  <a:txBody>
-                    <a:bodyPr/>
-                    <a:lstStyle/>
-                    <a:p>
-                      <a:r>
-                        <a:rPr sz="1100">
-                          <a:solidFill>
-                            <a:srgbClr val="1F2A44"/>
-                          </a:solidFill>
-                        </a:rPr>
-                        <a:t>WARN &gt;3,000 · ERROR &gt;10,000  (today: 1,160)</a:t>
-                      </a:r>
-                    </a:p>
-                  </a:txBody>
-                  <a:tcPr/>
-                </a:tc>
-                <a:tc>
-                  <a:txBody>
-                    <a:bodyPr/>
-                    <a:lstStyle/>
-                    <a:p>
-                      <a:r>
-                        <a:rPr sz="1100">
-                          <a:solidFill>
-                            <a:srgbClr val="1F2A44"/>
-                          </a:solidFill>
-                        </a:rPr>
-                        <a:t>Geography seed health — degradation of state-name coverage.</a:t>
-                      </a:r>
-                    </a:p>
-                  </a:txBody>
-                  <a:tcPr/>
-                </a:tc>
-              </a:tr>
-            </a:tbl>
-          </a:graphicData>
-        </a:graphic>
-      </p:graphicFrame>
-      <p:sp>
-        <p:nvSpPr>
-          <p:cNvPr id="5" name="TextBox 4"/>
+      <p:sp>
+        <p:nvSpPr>
+          <p:cNvPr id="4" name="TextBox 3"/>
           <p:cNvSpPr txBox="1"/>
           <p:nvPr/>
         </p:nvSpPr>
         <p:spPr>
           <a:xfrm>
-            <a:off x="548640" y="4754880"/>
-            <a:ext cx="11064240" cy="1371600"/>
+            <a:off x="548640" y="1371600"/>
+            <a:ext cx="11064240" cy="5303520"/>
           </a:xfrm>
           <a:prstGeom prst="rect">
             <a:avLst/>
@@ -8722,13 +8570,18 @@
           </a:bodyPr>
           <a:lstStyle/>
           <a:p>
-            <a:r>
-              <a:rPr sz="1400" b="0" i="1">
-                <a:solidFill>
-                  <a:srgbClr val="C0392B"/>
-                </a:solidFill>
-              </a:rPr>
-              <a:t>"Tests aren't a checkbox; they're the automated enforcement of the design contract. Each singular test protects one decision from D1–D8 — if a refactor breaks the decision, the test fires before the marts do."</a:t>
+            <a:pPr>
+              <a:spcAft>
+                <a:spcPts val="400"/>
+              </a:spcAft>
+            </a:pPr>
+            <a:r>
+              <a:rPr sz="2000">
+                <a:solidFill>
+                  <a:srgbClr val="1F2A44"/>
+                </a:solidFill>
+              </a:rPr>
+              <a:t>• FUTURE_IMPROVEMENTS.md</a:t>
             </a:r>
           </a:p>
         </p:txBody>
@@ -8741,7 +8594,7 @@
 </p:sld>
 </file>
 
-<file path=ppt/slides/slide21.xml><?xml version="1.0" encoding="utf-8"?>
+<file path=ppt/slides/slide3.xml><?xml version="1.0" encoding="utf-8"?>
 <p:sld xmlns:a="http://schemas.openxmlformats.org/drawingml/2006/main" xmlns:p="http://schemas.openxmlformats.org/presentationml/2006/main" xmlns:r="http://schemas.openxmlformats.org/officeDocument/2006/relationships">
   <p:cSld>
     <p:bg>
@@ -8787,7 +8640,7 @@
                   <a:srgbClr val="1F2A44"/>
                 </a:solidFill>
               </a:rPr>
-              <a:t>What I'd add for production</a:t>
+              <a:t>Data exploration</a:t>
             </a:r>
           </a:p>
         </p:txBody>
@@ -8835,16 +8688,410 @@
           </a:p>
         </p:txBody>
       </p:sp>
-      <p:sp>
-        <p:nvSpPr>
-          <p:cNvPr id="4" name="TextBox 3"/>
+      <p:graphicFrame>
+        <p:nvGraphicFramePr>
+          <p:cNvPr id="4" name="Table 3"/>
+          <p:cNvGraphicFramePr>
+            <a:graphicFrameLocks noGrp="1"/>
+          </p:cNvGraphicFramePr>
+          <p:nvPr/>
+        </p:nvGraphicFramePr>
+        <p:xfrm>
+          <a:off x="548640" y="1280160"/>
+          <a:ext cx="11064240" cy="3136391"/>
+        </p:xfrm>
+        <a:graphic>
+          <a:graphicData uri="http://schemas.openxmlformats.org/drawingml/2006/table">
+            <a:tbl>
+              <a:tblPr firstRow="1" bandRow="1">
+                <a:tableStyleId>{5C22544A-7EE6-4342-B048-85BDC9FD1C3A}</a:tableStyleId>
+              </a:tblPr>
+              <a:tblGrid>
+                <a:gridCol w="3200400"/>
+                <a:gridCol w="7863840"/>
+              </a:tblGrid>
+              <a:tr h="313639">
+                <a:tc>
+                  <a:txBody>
+                    <a:bodyPr/>
+                    <a:lstStyle/>
+                    <a:p>
+                      <a:r>
+                        <a:rPr sz="1300" b="1">
+                          <a:solidFill>
+                            <a:srgbClr val="FFFFFF"/>
+                          </a:solidFill>
+                        </a:rPr>
+                        <a:t>Metric</a:t>
+                      </a:r>
+                    </a:p>
+                  </a:txBody>
+                  <a:tcPr>
+                    <a:solidFill>
+                      <a:srgbClr val="1F2A44"/>
+                    </a:solidFill>
+                  </a:tcPr>
+                </a:tc>
+                <a:tc>
+                  <a:txBody>
+                    <a:bodyPr/>
+                    <a:lstStyle/>
+                    <a:p>
+                      <a:r>
+                        <a:rPr sz="1300" b="1">
+                          <a:solidFill>
+                            <a:srgbClr val="FFFFFF"/>
+                          </a:solidFill>
+                        </a:rPr>
+                        <a:t>Finding</a:t>
+                      </a:r>
+                    </a:p>
+                  </a:txBody>
+                  <a:tcPr>
+                    <a:solidFill>
+                      <a:srgbClr val="1F2A44"/>
+                    </a:solidFill>
+                  </a:tcPr>
+                </a:tc>
+              </a:tr>
+              <a:tr h="313639">
+                <a:tc>
+                  <a:txBody>
+                    <a:bodyPr/>
+                    <a:lstStyle/>
+                    <a:p>
+                      <a:r>
+                        <a:rPr sz="1100">
+                          <a:solidFill>
+                            <a:srgbClr val="1F2A44"/>
+                          </a:solidFill>
+                        </a:rPr>
+                        <a:t>Records</a:t>
+                      </a:r>
+                    </a:p>
+                  </a:txBody>
+                  <a:tcPr/>
+                </a:tc>
+                <a:tc>
+                  <a:txBody>
+                    <a:bodyPr/>
+                    <a:lstStyle/>
+                    <a:p>
+                      <a:r>
+                        <a:rPr sz="1100">
+                          <a:solidFill>
+                            <a:srgbClr val="1F2A44"/>
+                          </a:solidFill>
+                        </a:rPr>
+                        <a:t>128,975</a:t>
+                      </a:r>
+                    </a:p>
+                  </a:txBody>
+                  <a:tcPr/>
+                </a:tc>
+              </a:tr>
+              <a:tr h="313639">
+                <a:tc>
+                  <a:txBody>
+                    <a:bodyPr/>
+                    <a:lstStyle/>
+                    <a:p>
+                      <a:r>
+                        <a:rPr sz="1100">
+                          <a:solidFill>
+                            <a:srgbClr val="1F2A44"/>
+                          </a:solidFill>
+                        </a:rPr>
+                        <a:t>Unique orders</a:t>
+                      </a:r>
+                    </a:p>
+                  </a:txBody>
+                  <a:tcPr/>
+                </a:tc>
+                <a:tc>
+                  <a:txBody>
+                    <a:bodyPr/>
+                    <a:lstStyle/>
+                    <a:p>
+                      <a:r>
+                        <a:rPr sz="1100">
+                          <a:solidFill>
+                            <a:srgbClr val="1F2A44"/>
+                          </a:solidFill>
+                        </a:rPr>
+                        <a:t>120,378</a:t>
+                      </a:r>
+                    </a:p>
+                  </a:txBody>
+                  <a:tcPr/>
+                </a:tc>
+              </a:tr>
+              <a:tr h="313639">
+                <a:tc>
+                  <a:txBody>
+                    <a:bodyPr/>
+                    <a:lstStyle/>
+                    <a:p>
+                      <a:r>
+                        <a:rPr sz="1100">
+                          <a:solidFill>
+                            <a:srgbClr val="1F2A44"/>
+                          </a:solidFill>
+                        </a:rPr>
+                        <a:t>Source columns</a:t>
+                      </a:r>
+                    </a:p>
+                  </a:txBody>
+                  <a:tcPr/>
+                </a:tc>
+                <a:tc>
+                  <a:txBody>
+                    <a:bodyPr/>
+                    <a:lstStyle/>
+                    <a:p>
+                      <a:r>
+                        <a:rPr sz="1100">
+                          <a:solidFill>
+                            <a:srgbClr val="1F2A44"/>
+                          </a:solidFill>
+                        </a:rPr>
+                        <a:t>24</a:t>
+                      </a:r>
+                    </a:p>
+                  </a:txBody>
+                  <a:tcPr/>
+                </a:tc>
+              </a:tr>
+              <a:tr h="313639">
+                <a:tc>
+                  <a:txBody>
+                    <a:bodyPr/>
+                    <a:lstStyle/>
+                    <a:p>
+                      <a:r>
+                        <a:rPr sz="1100">
+                          <a:solidFill>
+                            <a:srgbClr val="1F2A44"/>
+                          </a:solidFill>
+                        </a:rPr>
+                        <a:t>Date range</a:t>
+                      </a:r>
+                    </a:p>
+                  </a:txBody>
+                  <a:tcPr/>
+                </a:tc>
+                <a:tc>
+                  <a:txBody>
+                    <a:bodyPr/>
+                    <a:lstStyle/>
+                    <a:p>
+                      <a:r>
+                        <a:rPr sz="1100">
+                          <a:solidFill>
+                            <a:srgbClr val="1F2A44"/>
+                          </a:solidFill>
+                        </a:rPr>
+                        <a:t>2022-03-31 → 2022-06-29 (91 distinct days)</a:t>
+                      </a:r>
+                    </a:p>
+                  </a:txBody>
+                  <a:tcPr/>
+                </a:tc>
+              </a:tr>
+              <a:tr h="313639">
+                <a:tc>
+                  <a:txBody>
+                    <a:bodyPr/>
+                    <a:lstStyle/>
+                    <a:p>
+                      <a:r>
+                        <a:rPr sz="1100">
+                          <a:solidFill>
+                            <a:srgbClr val="1F2A44"/>
+                          </a:solidFill>
+                        </a:rPr>
+                        <a:t>SKUs</a:t>
+                      </a:r>
+                    </a:p>
+                  </a:txBody>
+                  <a:tcPr/>
+                </a:tc>
+                <a:tc>
+                  <a:txBody>
+                    <a:bodyPr/>
+                    <a:lstStyle/>
+                    <a:p>
+                      <a:r>
+                        <a:rPr sz="1100">
+                          <a:solidFill>
+                            <a:srgbClr val="1F2A44"/>
+                          </a:solidFill>
+                        </a:rPr>
+                        <a:t>7,195</a:t>
+                      </a:r>
+                    </a:p>
+                  </a:txBody>
+                  <a:tcPr/>
+                </a:tc>
+              </a:tr>
+              <a:tr h="313639">
+                <a:tc>
+                  <a:txBody>
+                    <a:bodyPr/>
+                    <a:lstStyle/>
+                    <a:p>
+                      <a:r>
+                        <a:rPr sz="1100">
+                          <a:solidFill>
+                            <a:srgbClr val="1F2A44"/>
+                          </a:solidFill>
+                        </a:rPr>
+                        <a:t>Styles</a:t>
+                      </a:r>
+                    </a:p>
+                  </a:txBody>
+                  <a:tcPr/>
+                </a:tc>
+                <a:tc>
+                  <a:txBody>
+                    <a:bodyPr/>
+                    <a:lstStyle/>
+                    <a:p>
+                      <a:r>
+                        <a:rPr sz="1100">
+                          <a:solidFill>
+                            <a:srgbClr val="1F2A44"/>
+                          </a:solidFill>
+                        </a:rPr>
+                        <a:t>1,377</a:t>
+                      </a:r>
+                    </a:p>
+                  </a:txBody>
+                  <a:tcPr/>
+                </a:tc>
+              </a:tr>
+              <a:tr h="313639">
+                <a:tc>
+                  <a:txBody>
+                    <a:bodyPr/>
+                    <a:lstStyle/>
+                    <a:p>
+                      <a:r>
+                        <a:rPr sz="1100">
+                          <a:solidFill>
+                            <a:srgbClr val="1F2A44"/>
+                          </a:solidFill>
+                        </a:rPr>
+                        <a:t>Categories</a:t>
+                      </a:r>
+                    </a:p>
+                  </a:txBody>
+                  <a:tcPr/>
+                </a:tc>
+                <a:tc>
+                  <a:txBody>
+                    <a:bodyPr/>
+                    <a:lstStyle/>
+                    <a:p>
+                      <a:r>
+                        <a:rPr sz="1100">
+                          <a:solidFill>
+                            <a:srgbClr val="1F2A44"/>
+                          </a:solidFill>
+                        </a:rPr>
+                        <a:t>9</a:t>
+                      </a:r>
+                    </a:p>
+                  </a:txBody>
+                  <a:tcPr/>
+                </a:tc>
+              </a:tr>
+              <a:tr h="313639">
+                <a:tc>
+                  <a:txBody>
+                    <a:bodyPr/>
+                    <a:lstStyle/>
+                    <a:p>
+                      <a:r>
+                        <a:rPr sz="1100">
+                          <a:solidFill>
+                            <a:srgbClr val="1F2A44"/>
+                          </a:solidFill>
+                        </a:rPr>
+                        <a:t>Sizes</a:t>
+                      </a:r>
+                    </a:p>
+                  </a:txBody>
+                  <a:tcPr/>
+                </a:tc>
+                <a:tc>
+                  <a:txBody>
+                    <a:bodyPr/>
+                    <a:lstStyle/>
+                    <a:p>
+                      <a:r>
+                        <a:rPr sz="1100">
+                          <a:solidFill>
+                            <a:srgbClr val="1F2A44"/>
+                          </a:solidFill>
+                        </a:rPr>
+                        <a:t>11</a:t>
+                      </a:r>
+                    </a:p>
+                  </a:txBody>
+                  <a:tcPr/>
+                </a:tc>
+              </a:tr>
+              <a:tr h="313640">
+                <a:tc>
+                  <a:txBody>
+                    <a:bodyPr/>
+                    <a:lstStyle/>
+                    <a:p>
+                      <a:r>
+                        <a:rPr sz="1100">
+                          <a:solidFill>
+                            <a:srgbClr val="1F2A44"/>
+                          </a:solidFill>
+                        </a:rPr>
+                        <a:t>Ship cities</a:t>
+                      </a:r>
+                    </a:p>
+                  </a:txBody>
+                  <a:tcPr/>
+                </a:tc>
+                <a:tc>
+                  <a:txBody>
+                    <a:bodyPr/>
+                    <a:lstStyle/>
+                    <a:p>
+                      <a:r>
+                        <a:rPr sz="1100">
+                          <a:solidFill>
+                            <a:srgbClr val="1F2A44"/>
+                          </a:solidFill>
+                        </a:rPr>
+                        <a:t>8,955</a:t>
+                      </a:r>
+                    </a:p>
+                  </a:txBody>
+                  <a:tcPr/>
+                </a:tc>
+              </a:tr>
+            </a:tbl>
+          </a:graphicData>
+        </a:graphic>
+      </p:graphicFrame>
+      <p:sp>
+        <p:nvSpPr>
+          <p:cNvPr id="5" name="TextBox 4"/>
           <p:cNvSpPr txBox="1"/>
           <p:nvPr/>
         </p:nvSpPr>
         <p:spPr>
           <a:xfrm>
-            <a:off x="548640" y="1371600"/>
-            <a:ext cx="11064240" cy="5303520"/>
+            <a:off x="548640" y="5760720"/>
+            <a:ext cx="10972800" cy="457200"/>
           </a:xfrm>
           <a:prstGeom prst="rect">
             <a:avLst/>
@@ -8857,141 +9104,13 @@
           </a:bodyPr>
           <a:lstStyle/>
           <a:p>
-            <a:pPr>
-              <a:spcAft>
-                <a:spcPts val="400"/>
-              </a:spcAft>
-            </a:pPr>
-            <a:r>
-              <a:rPr sz="1400">
-                <a:solidFill>
-                  <a:srgbClr val="1F2A44"/>
-                </a:solidFill>
-              </a:rPr>
-              <a:t>• **CI/CD** — GitHub Actions running `dbt build` + `sqlfluff` on every PR; state-based partial rebuilds.</a:t>
-            </a:r>
-          </a:p>
-          <a:p>
-            <a:pPr>
-              <a:spcAft>
-                <a:spcPts val="400"/>
-              </a:spcAft>
-            </a:pPr>
-            <a:r>
-              <a:rPr sz="1400">
-                <a:solidFill>
-                  <a:srgbClr val="1F2A44"/>
-                </a:solidFill>
-              </a:rPr>
-              <a:t>• **Incremental fct_sales** — once we cross a few million rows, switch materialization from `table` to `incremental` (merge on order_id, sku).</a:t>
-            </a:r>
-          </a:p>
-          <a:p>
-            <a:pPr>
-              <a:spcAft>
-                <a:spcPts val="400"/>
-              </a:spcAft>
-            </a:pPr>
-            <a:r>
-              <a:rPr sz="1400">
-                <a:solidFill>
-                  <a:srgbClr val="1F2A44"/>
-                </a:solidFill>
-              </a:rPr>
-              <a:t>• **Observability layer** — `dbt-expectations` for distribution tests + Elementary or Monte Carlo for anomaly detection.</a:t>
-            </a:r>
-          </a:p>
-          <a:p>
-            <a:pPr>
-              <a:spcAft>
-                <a:spcPts val="400"/>
-              </a:spcAft>
-            </a:pPr>
-            <a:r>
-              <a:rPr sz="1400">
-                <a:solidFill>
-                  <a:srgbClr val="1F2A44"/>
-                </a:solidFill>
-              </a:rPr>
-              <a:t>• **Semantic layer + BI tool** — Looker / Metabase / dbt Semantic Layer wrapping the marts (see slide 18).</a:t>
-            </a:r>
-          </a:p>
-          <a:p>
-            <a:pPr>
-              <a:spcAft>
-                <a:spcPts val="400"/>
-              </a:spcAft>
-            </a:pPr>
-            <a:r>
-              <a:rPr sz="1400">
-                <a:solidFill>
-                  <a:srgbClr val="1F2A44"/>
-                </a:solidFill>
-              </a:rPr>
-              <a:t>• **State-name normalization** — expand `state_to_region.csv` with aliases OR add a fuzzy-match enrichment step (current gap: 1,160 fact rows fall on region='Unknown').</a:t>
-            </a:r>
-          </a:p>
-          <a:p>
-            <a:pPr>
-              <a:spcAft>
-                <a:spcPts val="400"/>
-              </a:spcAft>
-            </a:pPr>
-            <a:r>
-              <a:rPr sz="1400">
-                <a:solidFill>
-                  <a:srgbClr val="1F2A44"/>
-                </a:solidFill>
-              </a:rPr>
-              <a:t>• **Type 2 SCD** on dim_product / dim_geography via `dbt snapshot` — source lacks effective dates today, need to introduce.</a:t>
-            </a:r>
-          </a:p>
-          <a:p>
-            <a:pPr>
-              <a:spcAft>
-                <a:spcPts val="400"/>
-              </a:spcAft>
-            </a:pPr>
-            <a:r>
-              <a:rPr sz="1400">
-                <a:solidFill>
-                  <a:srgbClr val="1F2A44"/>
-                </a:solidFill>
-              </a:rPr>
-              <a:t>• **Data contracts** on marts models — enforced column types + constraints so breaking schema changes fail at build time.</a:t>
-            </a:r>
-          </a:p>
-        </p:txBody>
-      </p:sp>
-      <p:sp>
-        <p:nvSpPr>
-          <p:cNvPr id="5" name="TextBox 4"/>
-          <p:cNvSpPr txBox="1"/>
-          <p:nvPr/>
-        </p:nvSpPr>
-        <p:spPr>
-          <a:xfrm>
-            <a:off x="548640" y="6309360"/>
-            <a:ext cx="10972800" cy="365760"/>
-          </a:xfrm>
-          <a:prstGeom prst="rect">
-            <a:avLst/>
-          </a:prstGeom>
-          <a:noFill/>
-        </p:spPr>
-        <p:txBody>
-          <a:bodyPr wrap="square">
-            <a:spAutoFit/>
-          </a:bodyPr>
-          <a:lstStyle/>
-          <a:p>
             <a:r>
               <a:rPr sz="1300" b="0" i="1">
                 <a:solidFill>
                   <a:srgbClr val="6C757D"/>
                 </a:solidFill>
               </a:rPr>
-              <a:t>All items with rationale in FUTURE_IMPROVEMENTS.md.</a:t>
+              <a:t>Business concepts: Orders · Products · Sales · Location · Fulfilment</a:t>
             </a:r>
           </a:p>
         </p:txBody>
@@ -9004,7 +9123,7 @@
 </p:sld>
 </file>
 
-<file path=ppt/slides/slide3.xml><?xml version="1.0" encoding="utf-8"?>
+<file path=ppt/slides/slide4.xml><?xml version="1.0" encoding="utf-8"?>
 <p:sld xmlns:a="http://schemas.openxmlformats.org/drawingml/2006/main" xmlns:p="http://schemas.openxmlformats.org/presentationml/2006/main" xmlns:r="http://schemas.openxmlformats.org/officeDocument/2006/relationships">
   <p:cSld>
     <p:bg>
@@ -9050,7 +9169,7 @@
                   <a:srgbClr val="1F2A44"/>
                 </a:solidFill>
               </a:rPr>
-              <a:t>Data exploration</a:t>
+              <a:t>Source grain: one row ≠ one order</a:t>
             </a:r>
           </a:p>
         </p:txBody>
@@ -9098,17 +9217,50 @@
           </a:p>
         </p:txBody>
       </p:sp>
+      <p:sp>
+        <p:nvSpPr>
+          <p:cNvPr id="4" name="TextBox 3"/>
+          <p:cNvSpPr txBox="1"/>
+          <p:nvPr/>
+        </p:nvSpPr>
+        <p:spPr>
+          <a:xfrm>
+            <a:off x="548640" y="1280160"/>
+            <a:ext cx="5486400" cy="365760"/>
+          </a:xfrm>
+          <a:prstGeom prst="rect">
+            <a:avLst/>
+          </a:prstGeom>
+          <a:noFill/>
+        </p:spPr>
+        <p:txBody>
+          <a:bodyPr wrap="square">
+            <a:spAutoFit/>
+          </a:bodyPr>
+          <a:lstStyle/>
+          <a:p>
+            <a:r>
+              <a:rPr sz="1700" b="1" i="0">
+                <a:solidFill>
+                  <a:srgbClr val="1F2A44"/>
+                </a:solidFill>
+              </a:rPr>
+              <a:t>One order ≠ one row</a:t>
+            </a:r>
+          </a:p>
+        </p:txBody>
+      </p:sp>
       <p:graphicFrame>
         <p:nvGraphicFramePr>
-          <p:cNvPr id="4" name="Table 3"/>
+          <p:cNvPr id="5" name="Table 4"/>
           <p:cNvGraphicFramePr>
             <a:graphicFrameLocks noGrp="1"/>
           </p:cNvGraphicFramePr>
           <p:nvPr/>
         </p:nvGraphicFramePr>
         <p:xfrm>
-          <a:off x="548640" y="1280160"/>
-          <a:ext cx="11064240" cy="3136391"/>
+          <a:off x="548640" y="1737360"/>
+          <a:ext cx="5669280" cy="2258568"/>
         </p:xfrm>
         <a:graphic>
           <a:graphicData uri="http://schemas.openxmlformats.org/drawingml/2006/table">
@@ -9118,9 +9270,9 @@
               </a:tblPr>
               <a:tblGrid>
                 <a:gridCol w="3200400"/>
-                <a:gridCol w="7863840"/>
+                <a:gridCol w="2468880"/>
               </a:tblGrid>
-              <a:tr h="313639">
+              <a:tr h="322652">
                 <a:tc>
                   <a:txBody>
                     <a:bodyPr/>
@@ -9164,7 +9316,7 @@
                   </a:tcPr>
                 </a:tc>
               </a:tr>
-              <a:tr h="313639">
+              <a:tr h="322652">
                 <a:tc>
                   <a:txBody>
                     <a:bodyPr/>
@@ -9200,7 +9352,7 @@
                   <a:tcPr/>
                 </a:tc>
               </a:tr>
-              <a:tr h="313639">
+              <a:tr h="322652">
                 <a:tc>
                   <a:txBody>
                     <a:bodyPr/>
@@ -9236,252 +9388,144 @@
                   <a:tcPr/>
                 </a:tc>
               </a:tr>
-              <a:tr h="313639">
-                <a:tc>
-                  <a:txBody>
-                    <a:bodyPr/>
-                    <a:lstStyle/>
-                    <a:p>
-                      <a:r>
-                        <a:rPr sz="1100">
-                          <a:solidFill>
-                            <a:srgbClr val="1F2A44"/>
-                          </a:solidFill>
-                        </a:rPr>
-                        <a:t>Source columns</a:t>
-                      </a:r>
-                    </a:p>
-                  </a:txBody>
-                  <a:tcPr/>
-                </a:tc>
-                <a:tc>
-                  <a:txBody>
-                    <a:bodyPr/>
-                    <a:lstStyle/>
-                    <a:p>
-                      <a:r>
-                        <a:rPr sz="1100">
-                          <a:solidFill>
-                            <a:srgbClr val="1F2A44"/>
-                          </a:solidFill>
-                        </a:rPr>
-                        <a:t>24</a:t>
+              <a:tr h="322652">
+                <a:tc>
+                  <a:txBody>
+                    <a:bodyPr/>
+                    <a:lstStyle/>
+                    <a:p>
+                      <a:r>
+                        <a:rPr sz="1100">
+                          <a:solidFill>
+                            <a:srgbClr val="1F2A44"/>
+                          </a:solidFill>
+                        </a:rPr>
+                        <a:t>Extra line items</a:t>
+                      </a:r>
+                    </a:p>
+                  </a:txBody>
+                  <a:tcPr/>
+                </a:tc>
+                <a:tc>
+                  <a:txBody>
+                    <a:bodyPr/>
+                    <a:lstStyle/>
+                    <a:p>
+                      <a:r>
+                        <a:rPr sz="1100">
+                          <a:solidFill>
+                            <a:srgbClr val="1F2A44"/>
+                          </a:solidFill>
+                        </a:rPr>
+                        <a:t>8,597</a:t>
                       </a:r>
                     </a:p>
                   </a:txBody>
                   <a:tcPr/>
                 </a:tc>
               </a:tr>
-              <a:tr h="313639">
-                <a:tc>
-                  <a:txBody>
-                    <a:bodyPr/>
-                    <a:lstStyle/>
-                    <a:p>
-                      <a:r>
-                        <a:rPr sz="1100">
-                          <a:solidFill>
-                            <a:srgbClr val="1F2A44"/>
-                          </a:solidFill>
-                        </a:rPr>
-                        <a:t>Date range</a:t>
-                      </a:r>
-                    </a:p>
-                  </a:txBody>
-                  <a:tcPr/>
-                </a:tc>
-                <a:tc>
-                  <a:txBody>
-                    <a:bodyPr/>
-                    <a:lstStyle/>
-                    <a:p>
-                      <a:r>
-                        <a:rPr sz="1100">
-                          <a:solidFill>
-                            <a:srgbClr val="1F2A44"/>
-                          </a:solidFill>
-                        </a:rPr>
-                        <a:t>2022-03-31 → 2022-06-29 (91 distinct days)</a:t>
+              <a:tr h="322652">
+                <a:tc>
+                  <a:txBody>
+                    <a:bodyPr/>
+                    <a:lstStyle/>
+                    <a:p>
+                      <a:r>
+                        <a:rPr sz="1100">
+                          <a:solidFill>
+                            <a:srgbClr val="1F2A44"/>
+                          </a:solidFill>
+                        </a:rPr>
+                        <a:t>Orders w/ multiple rows</a:t>
+                      </a:r>
+                    </a:p>
+                  </a:txBody>
+                  <a:tcPr/>
+                </a:tc>
+                <a:tc>
+                  <a:txBody>
+                    <a:bodyPr/>
+                    <a:lstStyle/>
+                    <a:p>
+                      <a:r>
+                        <a:rPr sz="1100">
+                          <a:solidFill>
+                            <a:srgbClr val="1F2A44"/>
+                          </a:solidFill>
+                        </a:rPr>
+                        <a:t>6,846</a:t>
                       </a:r>
                     </a:p>
                   </a:txBody>
                   <a:tcPr/>
                 </a:tc>
               </a:tr>
-              <a:tr h="313639">
-                <a:tc>
-                  <a:txBody>
-                    <a:bodyPr/>
-                    <a:lstStyle/>
-                    <a:p>
-                      <a:r>
-                        <a:rPr sz="1100">
-                          <a:solidFill>
-                            <a:srgbClr val="1F2A44"/>
-                          </a:solidFill>
-                        </a:rPr>
-                        <a:t>SKUs</a:t>
-                      </a:r>
-                    </a:p>
-                  </a:txBody>
-                  <a:tcPr/>
-                </a:tc>
-                <a:tc>
-                  <a:txBody>
-                    <a:bodyPr/>
-                    <a:lstStyle/>
-                    <a:p>
-                      <a:r>
-                        <a:rPr sz="1100">
-                          <a:solidFill>
-                            <a:srgbClr val="1F2A44"/>
-                          </a:solidFill>
-                        </a:rPr>
-                        <a:t>7,195</a:t>
+              <a:tr h="322652">
+                <a:tc>
+                  <a:txBody>
+                    <a:bodyPr/>
+                    <a:lstStyle/>
+                    <a:p>
+                      <a:r>
+                        <a:rPr sz="1100">
+                          <a:solidFill>
+                            <a:srgbClr val="1F2A44"/>
+                          </a:solidFill>
+                        </a:rPr>
+                        <a:t>Max rows for one order</a:t>
+                      </a:r>
+                    </a:p>
+                  </a:txBody>
+                  <a:tcPr/>
+                </a:tc>
+                <a:tc>
+                  <a:txBody>
+                    <a:bodyPr/>
+                    <a:lstStyle/>
+                    <a:p>
+                      <a:r>
+                        <a:rPr sz="1100">
+                          <a:solidFill>
+                            <a:srgbClr val="1F2A44"/>
+                          </a:solidFill>
+                        </a:rPr>
+                        <a:t>12</a:t>
                       </a:r>
                     </a:p>
                   </a:txBody>
                   <a:tcPr/>
                 </a:tc>
               </a:tr>
-              <a:tr h="313639">
-                <a:tc>
-                  <a:txBody>
-                    <a:bodyPr/>
-                    <a:lstStyle/>
-                    <a:p>
-                      <a:r>
-                        <a:rPr sz="1100">
-                          <a:solidFill>
-                            <a:srgbClr val="1F2A44"/>
-                          </a:solidFill>
-                        </a:rPr>
-                        <a:t>Styles</a:t>
-                      </a:r>
-                    </a:p>
-                  </a:txBody>
-                  <a:tcPr/>
-                </a:tc>
-                <a:tc>
-                  <a:txBody>
-                    <a:bodyPr/>
-                    <a:lstStyle/>
-                    <a:p>
-                      <a:r>
-                        <a:rPr sz="1100">
-                          <a:solidFill>
-                            <a:srgbClr val="1F2A44"/>
-                          </a:solidFill>
-                        </a:rPr>
-                        <a:t>1,377</a:t>
-                      </a:r>
-                    </a:p>
-                  </a:txBody>
-                  <a:tcPr/>
-                </a:tc>
-              </a:tr>
-              <a:tr h="313639">
-                <a:tc>
-                  <a:txBody>
-                    <a:bodyPr/>
-                    <a:lstStyle/>
-                    <a:p>
-                      <a:r>
-                        <a:rPr sz="1100">
-                          <a:solidFill>
-                            <a:srgbClr val="1F2A44"/>
-                          </a:solidFill>
-                        </a:rPr>
-                        <a:t>Categories</a:t>
-                      </a:r>
-                    </a:p>
-                  </a:txBody>
-                  <a:tcPr/>
-                </a:tc>
-                <a:tc>
-                  <a:txBody>
-                    <a:bodyPr/>
-                    <a:lstStyle/>
-                    <a:p>
-                      <a:r>
-                        <a:rPr sz="1100">
-                          <a:solidFill>
-                            <a:srgbClr val="1F2A44"/>
-                          </a:solidFill>
-                        </a:rPr>
-                        <a:t>9</a:t>
-                      </a:r>
-                    </a:p>
-                  </a:txBody>
-                  <a:tcPr/>
-                </a:tc>
-              </a:tr>
-              <a:tr h="313639">
-                <a:tc>
-                  <a:txBody>
-                    <a:bodyPr/>
-                    <a:lstStyle/>
-                    <a:p>
-                      <a:r>
-                        <a:rPr sz="1100">
-                          <a:solidFill>
-                            <a:srgbClr val="1F2A44"/>
-                          </a:solidFill>
-                        </a:rPr>
-                        <a:t>Sizes</a:t>
-                      </a:r>
-                    </a:p>
-                  </a:txBody>
-                  <a:tcPr/>
-                </a:tc>
-                <a:tc>
-                  <a:txBody>
-                    <a:bodyPr/>
-                    <a:lstStyle/>
-                    <a:p>
-                      <a:r>
-                        <a:rPr sz="1100">
-                          <a:solidFill>
-                            <a:srgbClr val="1F2A44"/>
-                          </a:solidFill>
-                        </a:rPr>
-                        <a:t>11</a:t>
-                      </a:r>
-                    </a:p>
-                  </a:txBody>
-                  <a:tcPr/>
-                </a:tc>
-              </a:tr>
-              <a:tr h="313640">
-                <a:tc>
-                  <a:txBody>
-                    <a:bodyPr/>
-                    <a:lstStyle/>
-                    <a:p>
-                      <a:r>
-                        <a:rPr sz="1100">
-                          <a:solidFill>
-                            <a:srgbClr val="1F2A44"/>
-                          </a:solidFill>
-                        </a:rPr>
-                        <a:t>Ship cities</a:t>
-                      </a:r>
-                    </a:p>
-                  </a:txBody>
-                  <a:tcPr/>
-                </a:tc>
-                <a:tc>
-                  <a:txBody>
-                    <a:bodyPr/>
-                    <a:lstStyle/>
-                    <a:p>
-                      <a:r>
-                        <a:rPr sz="1100">
-                          <a:solidFill>
-                            <a:srgbClr val="1F2A44"/>
-                          </a:solidFill>
-                        </a:rPr>
-                        <a:t>8,955</a:t>
+              <a:tr h="322656">
+                <a:tc>
+                  <a:txBody>
+                    <a:bodyPr/>
+                    <a:lstStyle/>
+                    <a:p>
+                      <a:r>
+                        <a:rPr sz="1100">
+                          <a:solidFill>
+                            <a:srgbClr val="1F2A44"/>
+                          </a:solidFill>
+                        </a:rPr>
+                        <a:t>Exact-dup (Order ID, SKU) groups</a:t>
+                      </a:r>
+                    </a:p>
+                  </a:txBody>
+                  <a:tcPr/>
+                </a:tc>
+                <a:tc>
+                  <a:txBody>
+                    <a:bodyPr/>
+                    <a:lstStyle/>
+                    <a:p>
+                      <a:r>
+                        <a:rPr sz="1100">
+                          <a:solidFill>
+                            <a:srgbClr val="1F2A44"/>
+                          </a:solidFill>
+                        </a:rPr>
+                        <a:t>7</a:t>
                       </a:r>
                     </a:p>
                   </a:txBody>
@@ -9494,7 +9538,290 @@
       </p:graphicFrame>
       <p:sp>
         <p:nvSpPr>
-          <p:cNvPr id="5" name="TextBox 4"/>
+          <p:cNvPr id="6" name="TextBox 5"/>
+          <p:cNvSpPr txBox="1"/>
+          <p:nvPr/>
+        </p:nvSpPr>
+        <p:spPr>
+          <a:xfrm>
+            <a:off x="6400800" y="1280160"/>
+            <a:ext cx="5486400" cy="365760"/>
+          </a:xfrm>
+          <a:prstGeom prst="rect">
+            <a:avLst/>
+          </a:prstGeom>
+          <a:noFill/>
+        </p:spPr>
+        <p:txBody>
+          <a:bodyPr wrap="square">
+            <a:spAutoFit/>
+          </a:bodyPr>
+          <a:lstStyle/>
+          <a:p>
+            <a:r>
+              <a:rPr sz="1700" b="1" i="0">
+                <a:solidFill>
+                  <a:srgbClr val="1F2A44"/>
+                </a:solidFill>
+              </a:rPr>
+              <a:t>Product hierarchy  Style → SKU → Size</a:t>
+            </a:r>
+          </a:p>
+        </p:txBody>
+      </p:sp>
+      <p:graphicFrame>
+        <p:nvGraphicFramePr>
+          <p:cNvPr id="7" name="Table 6"/>
+          <p:cNvGraphicFramePr>
+            <a:graphicFrameLocks noGrp="1"/>
+          </p:cNvGraphicFramePr>
+          <p:nvPr/>
+        </p:nvGraphicFramePr>
+        <p:xfrm>
+          <a:off x="6400800" y="1737360"/>
+          <a:ext cx="5212080" cy="1965960"/>
+        </p:xfrm>
+        <a:graphic>
+          <a:graphicData uri="http://schemas.openxmlformats.org/drawingml/2006/table">
+            <a:tbl>
+              <a:tblPr firstRow="1" bandRow="1">
+                <a:tableStyleId>{5C22544A-7EE6-4342-B048-85BDC9FD1C3A}</a:tableStyleId>
+              </a:tblPr>
+              <a:tblGrid>
+                <a:gridCol w="2926080"/>
+                <a:gridCol w="2286000"/>
+              </a:tblGrid>
+              <a:tr h="327660">
+                <a:tc>
+                  <a:txBody>
+                    <a:bodyPr/>
+                    <a:lstStyle/>
+                    <a:p>
+                      <a:r>
+                        <a:rPr sz="1300" b="1">
+                          <a:solidFill>
+                            <a:srgbClr val="FFFFFF"/>
+                          </a:solidFill>
+                        </a:rPr>
+                        <a:t>Metric</a:t>
+                      </a:r>
+                    </a:p>
+                  </a:txBody>
+                  <a:tcPr>
+                    <a:solidFill>
+                      <a:srgbClr val="1F2A44"/>
+                    </a:solidFill>
+                  </a:tcPr>
+                </a:tc>
+                <a:tc>
+                  <a:txBody>
+                    <a:bodyPr/>
+                    <a:lstStyle/>
+                    <a:p>
+                      <a:r>
+                        <a:rPr sz="1300" b="1">
+                          <a:solidFill>
+                            <a:srgbClr val="FFFFFF"/>
+                          </a:solidFill>
+                        </a:rPr>
+                        <a:t>Finding</a:t>
+                      </a:r>
+                    </a:p>
+                  </a:txBody>
+                  <a:tcPr>
+                    <a:solidFill>
+                      <a:srgbClr val="1F2A44"/>
+                    </a:solidFill>
+                  </a:tcPr>
+                </a:tc>
+              </a:tr>
+              <a:tr h="327660">
+                <a:tc>
+                  <a:txBody>
+                    <a:bodyPr/>
+                    <a:lstStyle/>
+                    <a:p>
+                      <a:r>
+                        <a:rPr sz="1100">
+                          <a:solidFill>
+                            <a:srgbClr val="1F2A44"/>
+                          </a:solidFill>
+                        </a:rPr>
+                        <a:t>Styles</a:t>
+                      </a:r>
+                    </a:p>
+                  </a:txBody>
+                  <a:tcPr/>
+                </a:tc>
+                <a:tc>
+                  <a:txBody>
+                    <a:bodyPr/>
+                    <a:lstStyle/>
+                    <a:p>
+                      <a:r>
+                        <a:rPr sz="1100">
+                          <a:solidFill>
+                            <a:srgbClr val="1F2A44"/>
+                          </a:solidFill>
+                        </a:rPr>
+                        <a:t>1,377</a:t>
+                      </a:r>
+                    </a:p>
+                  </a:txBody>
+                  <a:tcPr/>
+                </a:tc>
+              </a:tr>
+              <a:tr h="327660">
+                <a:tc>
+                  <a:txBody>
+                    <a:bodyPr/>
+                    <a:lstStyle/>
+                    <a:p>
+                      <a:r>
+                        <a:rPr sz="1100">
+                          <a:solidFill>
+                            <a:srgbClr val="1F2A44"/>
+                          </a:solidFill>
+                        </a:rPr>
+                        <a:t>SKUs</a:t>
+                      </a:r>
+                    </a:p>
+                  </a:txBody>
+                  <a:tcPr/>
+                </a:tc>
+                <a:tc>
+                  <a:txBody>
+                    <a:bodyPr/>
+                    <a:lstStyle/>
+                    <a:p>
+                      <a:r>
+                        <a:rPr sz="1100">
+                          <a:solidFill>
+                            <a:srgbClr val="1F2A44"/>
+                          </a:solidFill>
+                        </a:rPr>
+                        <a:t>7,195</a:t>
+                      </a:r>
+                    </a:p>
+                  </a:txBody>
+                  <a:tcPr/>
+                </a:tc>
+              </a:tr>
+              <a:tr h="327660">
+                <a:tc>
+                  <a:txBody>
+                    <a:bodyPr/>
+                    <a:lstStyle/>
+                    <a:p>
+                      <a:r>
+                        <a:rPr sz="1100">
+                          <a:solidFill>
+                            <a:srgbClr val="1F2A44"/>
+                          </a:solidFill>
+                        </a:rPr>
+                        <a:t>Sizes</a:t>
+                      </a:r>
+                    </a:p>
+                  </a:txBody>
+                  <a:tcPr/>
+                </a:tc>
+                <a:tc>
+                  <a:txBody>
+                    <a:bodyPr/>
+                    <a:lstStyle/>
+                    <a:p>
+                      <a:r>
+                        <a:rPr sz="1100">
+                          <a:solidFill>
+                            <a:srgbClr val="1F2A44"/>
+                          </a:solidFill>
+                        </a:rPr>
+                        <a:t>11</a:t>
+                      </a:r>
+                    </a:p>
+                  </a:txBody>
+                  <a:tcPr/>
+                </a:tc>
+              </a:tr>
+              <a:tr h="327660">
+                <a:tc>
+                  <a:txBody>
+                    <a:bodyPr/>
+                    <a:lstStyle/>
+                    <a:p>
+                      <a:r>
+                        <a:rPr sz="1100">
+                          <a:solidFill>
+                            <a:srgbClr val="1F2A44"/>
+                          </a:solidFill>
+                        </a:rPr>
+                        <a:t>Styles w/ multiple SKUs</a:t>
+                      </a:r>
+                    </a:p>
+                  </a:txBody>
+                  <a:tcPr/>
+                </a:tc>
+                <a:tc>
+                  <a:txBody>
+                    <a:bodyPr/>
+                    <a:lstStyle/>
+                    <a:p>
+                      <a:r>
+                        <a:rPr sz="1100">
+                          <a:solidFill>
+                            <a:srgbClr val="1F2A44"/>
+                          </a:solidFill>
+                        </a:rPr>
+                        <a:t>1,180</a:t>
+                      </a:r>
+                    </a:p>
+                  </a:txBody>
+                  <a:tcPr/>
+                </a:tc>
+              </a:tr>
+              <a:tr h="327660">
+                <a:tc>
+                  <a:txBody>
+                    <a:bodyPr/>
+                    <a:lstStyle/>
+                    <a:p>
+                      <a:r>
+                        <a:rPr sz="1100">
+                          <a:solidFill>
+                            <a:srgbClr val="1F2A44"/>
+                          </a:solidFill>
+                        </a:rPr>
+                        <a:t>Max SKUs for one style</a:t>
+                      </a:r>
+                    </a:p>
+                  </a:txBody>
+                  <a:tcPr/>
+                </a:tc>
+                <a:tc>
+                  <a:txBody>
+                    <a:bodyPr/>
+                    <a:lstStyle/>
+                    <a:p>
+                      <a:r>
+                        <a:rPr sz="1100">
+                          <a:solidFill>
+                            <a:srgbClr val="1F2A44"/>
+                          </a:solidFill>
+                        </a:rPr>
+                        <a:t>14</a:t>
+                      </a:r>
+                    </a:p>
+                  </a:txBody>
+                  <a:tcPr/>
+                </a:tc>
+              </a:tr>
+            </a:tbl>
+          </a:graphicData>
+        </a:graphic>
+      </p:graphicFrame>
+      <p:sp>
+        <p:nvSpPr>
+          <p:cNvPr id="8" name="TextBox 7"/>
           <p:cNvSpPr txBox="1"/>
           <p:nvPr/>
         </p:nvSpPr>
@@ -9517,10 +9844,10 @@
             <a:r>
               <a:rPr sz="1300" b="0" i="1">
                 <a:solidFill>
-                  <a:srgbClr val="6C757D"/>
-                </a:solidFill>
-              </a:rPr>
-              <a:t>Business concepts: Orders · Products · Sales · Location · Fulfilment</a:t>
+                  <a:srgbClr val="C0392B"/>
+                </a:solidFill>
+              </a:rPr>
+              <a:t>Fact grain = order × SKU line item. (Order ID, SKU) needs DISTINCT in staging (D2).</a:t>
             </a:r>
           </a:p>
         </p:txBody>
@@ -9533,7 +9860,7 @@
 </p:sld>
 </file>
 
-<file path=ppt/slides/slide4.xml><?xml version="1.0" encoding="utf-8"?>
+<file path=ppt/slides/slide5.xml><?xml version="1.0" encoding="utf-8"?>
 <p:sld xmlns:a="http://schemas.openxmlformats.org/drawingml/2006/main" xmlns:p="http://schemas.openxmlformats.org/presentationml/2006/main" xmlns:r="http://schemas.openxmlformats.org/officeDocument/2006/relationships">
   <p:cSld>
     <p:bg>
@@ -9579,7 +9906,7 @@
                   <a:srgbClr val="1F2A44"/>
                 </a:solidFill>
               </a:rPr>
-              <a:t>Source grain: one row ≠ one order</a:t>
+              <a:t>Data quality — completeness &amp; uniqueness</a:t>
             </a:r>
           </a:p>
         </p:txBody>
@@ -9627,50 +9954,17 @@
           </a:p>
         </p:txBody>
       </p:sp>
-      <p:sp>
-        <p:nvSpPr>
-          <p:cNvPr id="4" name="TextBox 3"/>
-          <p:cNvSpPr txBox="1"/>
-          <p:nvPr/>
-        </p:nvSpPr>
-        <p:spPr>
-          <a:xfrm>
-            <a:off x="548640" y="1280160"/>
-            <a:ext cx="5486400" cy="365760"/>
-          </a:xfrm>
-          <a:prstGeom prst="rect">
-            <a:avLst/>
-          </a:prstGeom>
-          <a:noFill/>
-        </p:spPr>
-        <p:txBody>
-          <a:bodyPr wrap="square">
-            <a:spAutoFit/>
-          </a:bodyPr>
-          <a:lstStyle/>
-          <a:p>
-            <a:r>
-              <a:rPr sz="1700" b="1" i="0">
-                <a:solidFill>
-                  <a:srgbClr val="1F2A44"/>
-                </a:solidFill>
-              </a:rPr>
-              <a:t>One order ≠ one row</a:t>
-            </a:r>
-          </a:p>
-        </p:txBody>
-      </p:sp>
       <p:graphicFrame>
         <p:nvGraphicFramePr>
-          <p:cNvPr id="5" name="Table 4"/>
+          <p:cNvPr id="4" name="Table 3"/>
           <p:cNvGraphicFramePr>
             <a:graphicFrameLocks noGrp="1"/>
           </p:cNvGraphicFramePr>
           <p:nvPr/>
         </p:nvGraphicFramePr>
         <p:xfrm>
-          <a:off x="548640" y="1737360"/>
-          <a:ext cx="5669280" cy="2258568"/>
+          <a:off x="548640" y="1280160"/>
+          <a:ext cx="11064240" cy="2843784"/>
         </p:xfrm>
         <a:graphic>
           <a:graphicData uri="http://schemas.openxmlformats.org/drawingml/2006/table">
@@ -9679,10 +9973,10 @@
                 <a:tableStyleId>{5C22544A-7EE6-4342-B048-85BDC9FD1C3A}</a:tableStyleId>
               </a:tblPr>
               <a:tblGrid>
-                <a:gridCol w="3200400"/>
-                <a:gridCol w="2468880"/>
+                <a:gridCol w="7772400"/>
+                <a:gridCol w="3291840"/>
               </a:tblGrid>
-              <a:tr h="322652">
+              <a:tr h="315976">
                 <a:tc>
                   <a:txBody>
                     <a:bodyPr/>
@@ -9694,7 +9988,7 @@
                             <a:srgbClr val="FFFFFF"/>
                           </a:solidFill>
                         </a:rPr>
-                        <a:t>Metric</a:t>
+                        <a:t>Check</a:t>
                       </a:r>
                     </a:p>
                   </a:txBody>
@@ -9715,7 +10009,7 @@
                             <a:srgbClr val="FFFFFF"/>
                           </a:solidFill>
                         </a:rPr>
-                        <a:t>Finding</a:t>
+                        <a:t>Result</a:t>
                       </a:r>
                     </a:p>
                   </a:txBody>
@@ -9726,216 +10020,288 @@
                   </a:tcPr>
                 </a:tc>
               </a:tr>
-              <a:tr h="322652">
-                <a:tc>
-                  <a:txBody>
-                    <a:bodyPr/>
-                    <a:lstStyle/>
-                    <a:p>
-                      <a:r>
-                        <a:rPr sz="1100">
-                          <a:solidFill>
-                            <a:srgbClr val="1F2A44"/>
-                          </a:solidFill>
-                        </a:rPr>
-                        <a:t>Records</a:t>
-                      </a:r>
-                    </a:p>
-                  </a:txBody>
-                  <a:tcPr/>
-                </a:tc>
-                <a:tc>
-                  <a:txBody>
-                    <a:bodyPr/>
-                    <a:lstStyle/>
-                    <a:p>
-                      <a:r>
-                        <a:rPr sz="1100">
-                          <a:solidFill>
-                            <a:srgbClr val="1F2A44"/>
-                          </a:solidFill>
-                        </a:rPr>
-                        <a:t>128,975</a:t>
+              <a:tr h="315976">
+                <a:tc>
+                  <a:txBody>
+                    <a:bodyPr/>
+                    <a:lstStyle/>
+                    <a:p>
+                      <a:r>
+                        <a:rPr sz="1100">
+                          <a:solidFill>
+                            <a:srgbClr val="1F2A44"/>
+                          </a:solidFill>
+                        </a:rPr>
+                        <a:t>Business-level exact duplicate rows (excl. `index`)</a:t>
+                      </a:r>
+                    </a:p>
+                  </a:txBody>
+                  <a:tcPr/>
+                </a:tc>
+                <a:tc>
+                  <a:txBody>
+                    <a:bodyPr/>
+                    <a:lstStyle/>
+                    <a:p>
+                      <a:r>
+                        <a:rPr sz="1100">
+                          <a:solidFill>
+                            <a:srgbClr val="1F2A44"/>
+                          </a:solidFill>
+                        </a:rPr>
+                        <a:t>6</a:t>
                       </a:r>
                     </a:p>
                   </a:txBody>
                   <a:tcPr/>
                 </a:tc>
               </a:tr>
-              <a:tr h="322652">
-                <a:tc>
-                  <a:txBody>
-                    <a:bodyPr/>
-                    <a:lstStyle/>
-                    <a:p>
-                      <a:r>
-                        <a:rPr sz="1100">
-                          <a:solidFill>
-                            <a:srgbClr val="1F2A44"/>
-                          </a:solidFill>
-                        </a:rPr>
-                        <a:t>Unique orders</a:t>
-                      </a:r>
-                    </a:p>
-                  </a:txBody>
-                  <a:tcPr/>
-                </a:tc>
-                <a:tc>
-                  <a:txBody>
-                    <a:bodyPr/>
-                    <a:lstStyle/>
-                    <a:p>
-                      <a:r>
-                        <a:rPr sz="1100">
-                          <a:solidFill>
-                            <a:srgbClr val="1F2A44"/>
-                          </a:solidFill>
-                        </a:rPr>
-                        <a:t>120,378</a:t>
+              <a:tr h="315976">
+                <a:tc>
+                  <a:txBody>
+                    <a:bodyPr/>
+                    <a:lstStyle/>
+                    <a:p>
+                      <a:r>
+                        <a:rPr sz="1100">
+                          <a:solidFill>
+                            <a:srgbClr val="1F2A44"/>
+                          </a:solidFill>
+                        </a:rPr>
+                        <a:t>Missing Amount</a:t>
+                      </a:r>
+                    </a:p>
+                  </a:txBody>
+                  <a:tcPr/>
+                </a:tc>
+                <a:tc>
+                  <a:txBody>
+                    <a:bodyPr/>
+                    <a:lstStyle/>
+                    <a:p>
+                      <a:r>
+                        <a:rPr sz="1100">
+                          <a:solidFill>
+                            <a:srgbClr val="1F2A44"/>
+                          </a:solidFill>
+                        </a:rPr>
+                        <a:t>7,795</a:t>
                       </a:r>
                     </a:p>
                   </a:txBody>
                   <a:tcPr/>
                 </a:tc>
               </a:tr>
-              <a:tr h="322652">
-                <a:tc>
-                  <a:txBody>
-                    <a:bodyPr/>
-                    <a:lstStyle/>
-                    <a:p>
-                      <a:r>
-                        <a:rPr sz="1100">
-                          <a:solidFill>
-                            <a:srgbClr val="1F2A44"/>
-                          </a:solidFill>
-                        </a:rPr>
-                        <a:t>Extra line items</a:t>
-                      </a:r>
-                    </a:p>
-                  </a:txBody>
-                  <a:tcPr/>
-                </a:tc>
-                <a:tc>
-                  <a:txBody>
-                    <a:bodyPr/>
-                    <a:lstStyle/>
-                    <a:p>
-                      <a:r>
-                        <a:rPr sz="1100">
-                          <a:solidFill>
-                            <a:srgbClr val="1F2A44"/>
-                          </a:solidFill>
-                        </a:rPr>
-                        <a:t>8,597</a:t>
+              <a:tr h="315976">
+                <a:tc>
+                  <a:txBody>
+                    <a:bodyPr/>
+                    <a:lstStyle/>
+                    <a:p>
+                      <a:r>
+                        <a:rPr sz="1100">
+                          <a:solidFill>
+                            <a:srgbClr val="1F2A44"/>
+                          </a:solidFill>
+                        </a:rPr>
+                        <a:t>Qty = 0</a:t>
+                      </a:r>
+                    </a:p>
+                  </a:txBody>
+                  <a:tcPr/>
+                </a:tc>
+                <a:tc>
+                  <a:txBody>
+                    <a:bodyPr/>
+                    <a:lstStyle/>
+                    <a:p>
+                      <a:r>
+                        <a:rPr sz="1100">
+                          <a:solidFill>
+                            <a:srgbClr val="1F2A44"/>
+                          </a:solidFill>
+                        </a:rPr>
+                        <a:t>12,807</a:t>
                       </a:r>
                     </a:p>
                   </a:txBody>
                   <a:tcPr/>
                 </a:tc>
               </a:tr>
-              <a:tr h="322652">
-                <a:tc>
-                  <a:txBody>
-                    <a:bodyPr/>
-                    <a:lstStyle/>
-                    <a:p>
-                      <a:r>
-                        <a:rPr sz="1100">
-                          <a:solidFill>
-                            <a:srgbClr val="1F2A44"/>
-                          </a:solidFill>
-                        </a:rPr>
-                        <a:t>Orders w/ multiple rows</a:t>
-                      </a:r>
-                    </a:p>
-                  </a:txBody>
-                  <a:tcPr/>
-                </a:tc>
-                <a:tc>
-                  <a:txBody>
-                    <a:bodyPr/>
-                    <a:lstStyle/>
-                    <a:p>
-                      <a:r>
-                        <a:rPr sz="1100">
-                          <a:solidFill>
-                            <a:srgbClr val="1F2A44"/>
-                          </a:solidFill>
-                        </a:rPr>
-                        <a:t>6,846</a:t>
+              <a:tr h="315976">
+                <a:tc>
+                  <a:txBody>
+                    <a:bodyPr/>
+                    <a:lstStyle/>
+                    <a:p>
+                      <a:r>
+                        <a:rPr sz="1100">
+                          <a:solidFill>
+                            <a:srgbClr val="1F2A44"/>
+                          </a:solidFill>
+                        </a:rPr>
+                        <a:t>Negative Qty / Negative Amount</a:t>
+                      </a:r>
+                    </a:p>
+                  </a:txBody>
+                  <a:tcPr/>
+                </a:tc>
+                <a:tc>
+                  <a:txBody>
+                    <a:bodyPr/>
+                    <a:lstStyle/>
+                    <a:p>
+                      <a:r>
+                        <a:rPr sz="1100">
+                          <a:solidFill>
+                            <a:srgbClr val="1F2A44"/>
+                          </a:solidFill>
+                        </a:rPr>
+                        <a:t>0 / 0</a:t>
                       </a:r>
                     </a:p>
                   </a:txBody>
                   <a:tcPr/>
                 </a:tc>
               </a:tr>
-              <a:tr h="322652">
-                <a:tc>
-                  <a:txBody>
-                    <a:bodyPr/>
-                    <a:lstStyle/>
-                    <a:p>
-                      <a:r>
-                        <a:rPr sz="1100">
-                          <a:solidFill>
-                            <a:srgbClr val="1F2A44"/>
-                          </a:solidFill>
-                        </a:rPr>
-                        <a:t>Max rows for one order</a:t>
-                      </a:r>
-                    </a:p>
-                  </a:txBody>
-                  <a:tcPr/>
-                </a:tc>
-                <a:tc>
-                  <a:txBody>
-                    <a:bodyPr/>
-                    <a:lstStyle/>
-                    <a:p>
-                      <a:r>
-                        <a:rPr sz="1100">
-                          <a:solidFill>
-                            <a:srgbClr val="1F2A44"/>
-                          </a:solidFill>
-                        </a:rPr>
-                        <a:t>12</a:t>
+              <a:tr h="315976">
+                <a:tc>
+                  <a:txBody>
+                    <a:bodyPr/>
+                    <a:lstStyle/>
+                    <a:p>
+                      <a:r>
+                        <a:rPr sz="1100">
+                          <a:solidFill>
+                            <a:srgbClr val="1F2A44"/>
+                          </a:solidFill>
+                        </a:rPr>
+                        <a:t>Invalid dates (format %m-%d-%y)</a:t>
+                      </a:r>
+                    </a:p>
+                  </a:txBody>
+                  <a:tcPr/>
+                </a:tc>
+                <a:tc>
+                  <a:txBody>
+                    <a:bodyPr/>
+                    <a:lstStyle/>
+                    <a:p>
+                      <a:r>
+                        <a:rPr sz="1100">
+                          <a:solidFill>
+                            <a:srgbClr val="1F2A44"/>
+                          </a:solidFill>
+                        </a:rPr>
+                        <a:t>0</a:t>
                       </a:r>
                     </a:p>
                   </a:txBody>
                   <a:tcPr/>
                 </a:tc>
               </a:tr>
-              <a:tr h="322656">
-                <a:tc>
-                  <a:txBody>
-                    <a:bodyPr/>
-                    <a:lstStyle/>
-                    <a:p>
-                      <a:r>
-                        <a:rPr sz="1100">
-                          <a:solidFill>
-                            <a:srgbClr val="1F2A44"/>
-                          </a:solidFill>
-                        </a:rPr>
-                        <a:t>Exact-dup (Order ID, SKU) groups</a:t>
-                      </a:r>
-                    </a:p>
-                  </a:txBody>
-                  <a:tcPr/>
-                </a:tc>
-                <a:tc>
-                  <a:txBody>
-                    <a:bodyPr/>
-                    <a:lstStyle/>
-                    <a:p>
-                      <a:r>
-                        <a:rPr sz="1100">
-                          <a:solidFill>
-                            <a:srgbClr val="1F2A44"/>
-                          </a:solidFill>
-                        </a:rPr>
-                        <a:t>7</a:t>
+              <a:tr h="315976">
+                <a:tc>
+                  <a:txBody>
+                    <a:bodyPr/>
+                    <a:lstStyle/>
+                    <a:p>
+                      <a:r>
+                        <a:rPr sz="1100">
+                          <a:solidFill>
+                            <a:srgbClr val="1F2A44"/>
+                          </a:solidFill>
+                        </a:rPr>
+                        <a:t>Missing shipping info</a:t>
+                      </a:r>
+                    </a:p>
+                  </a:txBody>
+                  <a:tcPr/>
+                </a:tc>
+                <a:tc>
+                  <a:txBody>
+                    <a:bodyPr/>
+                    <a:lstStyle/>
+                    <a:p>
+                      <a:r>
+                        <a:rPr sz="1100">
+                          <a:solidFill>
+                            <a:srgbClr val="1F2A44"/>
+                          </a:solidFill>
+                        </a:rPr>
+                        <a:t>33</a:t>
+                      </a:r>
+                    </a:p>
+                  </a:txBody>
+                  <a:tcPr/>
+                </a:tc>
+              </a:tr>
+              <a:tr h="315976">
+                <a:tc>
+                  <a:txBody>
+                    <a:bodyPr/>
+                    <a:lstStyle/>
+                    <a:p>
+                      <a:r>
+                        <a:rPr sz="1100">
+                          <a:solidFill>
+                            <a:srgbClr val="1F2A44"/>
+                          </a:solidFill>
+                        </a:rPr>
+                        <a:t>SKU → Style / Category / Size drift</a:t>
+                      </a:r>
+                    </a:p>
+                  </a:txBody>
+                  <a:tcPr/>
+                </a:tc>
+                <a:tc>
+                  <a:txBody>
+                    <a:bodyPr/>
+                    <a:lstStyle/>
+                    <a:p>
+                      <a:r>
+                        <a:rPr sz="1100">
+                          <a:solidFill>
+                            <a:srgbClr val="1F2A44"/>
+                          </a:solidFill>
+                        </a:rPr>
+                        <a:t>0 / 0 / 0</a:t>
+                      </a:r>
+                    </a:p>
+                  </a:txBody>
+                  <a:tcPr/>
+                </a:tc>
+              </a:tr>
+              <a:tr h="315976">
+                <a:tc>
+                  <a:txBody>
+                    <a:bodyPr/>
+                    <a:lstStyle/>
+                    <a:p>
+                      <a:r>
+                        <a:rPr sz="1100">
+                          <a:solidFill>
+                            <a:srgbClr val="1F2A44"/>
+                          </a:solidFill>
+                        </a:rPr>
+                        <a:t>Status ↔ Courier Status contradictions</a:t>
+                      </a:r>
+                    </a:p>
+                  </a:txBody>
+                  <a:tcPr/>
+                </a:tc>
+                <a:tc>
+                  <a:txBody>
+                    <a:bodyPr/>
+                    <a:lstStyle/>
+                    <a:p>
+                      <a:r>
+                        <a:rPr sz="1100">
+                          <a:solidFill>
+                            <a:srgbClr val="1F2A44"/>
+                          </a:solidFill>
+                        </a:rPr>
+                        <a:t>218 (0.17%)</a:t>
                       </a:r>
                     </a:p>
                   </a:txBody>
@@ -9948,296 +10314,13 @@
       </p:graphicFrame>
       <p:sp>
         <p:nvSpPr>
-          <p:cNvPr id="6" name="TextBox 5"/>
+          <p:cNvPr id="5" name="TextBox 4"/>
           <p:cNvSpPr txBox="1"/>
           <p:nvPr/>
         </p:nvSpPr>
         <p:spPr>
           <a:xfrm>
-            <a:off x="6400800" y="1280160"/>
-            <a:ext cx="5486400" cy="365760"/>
-          </a:xfrm>
-          <a:prstGeom prst="rect">
-            <a:avLst/>
-          </a:prstGeom>
-          <a:noFill/>
-        </p:spPr>
-        <p:txBody>
-          <a:bodyPr wrap="square">
-            <a:spAutoFit/>
-          </a:bodyPr>
-          <a:lstStyle/>
-          <a:p>
-            <a:r>
-              <a:rPr sz="1700" b="1" i="0">
-                <a:solidFill>
-                  <a:srgbClr val="1F2A44"/>
-                </a:solidFill>
-              </a:rPr>
-              <a:t>Product hierarchy  Style → SKU → Size</a:t>
-            </a:r>
-          </a:p>
-        </p:txBody>
-      </p:sp>
-      <p:graphicFrame>
-        <p:nvGraphicFramePr>
-          <p:cNvPr id="7" name="Table 6"/>
-          <p:cNvGraphicFramePr>
-            <a:graphicFrameLocks noGrp="1"/>
-          </p:cNvGraphicFramePr>
-          <p:nvPr/>
-        </p:nvGraphicFramePr>
-        <p:xfrm>
-          <a:off x="6400800" y="1737360"/>
-          <a:ext cx="5212080" cy="1965960"/>
-        </p:xfrm>
-        <a:graphic>
-          <a:graphicData uri="http://schemas.openxmlformats.org/drawingml/2006/table">
-            <a:tbl>
-              <a:tblPr firstRow="1" bandRow="1">
-                <a:tableStyleId>{5C22544A-7EE6-4342-B048-85BDC9FD1C3A}</a:tableStyleId>
-              </a:tblPr>
-              <a:tblGrid>
-                <a:gridCol w="2926080"/>
-                <a:gridCol w="2286000"/>
-              </a:tblGrid>
-              <a:tr h="327660">
-                <a:tc>
-                  <a:txBody>
-                    <a:bodyPr/>
-                    <a:lstStyle/>
-                    <a:p>
-                      <a:r>
-                        <a:rPr sz="1300" b="1">
-                          <a:solidFill>
-                            <a:srgbClr val="FFFFFF"/>
-                          </a:solidFill>
-                        </a:rPr>
-                        <a:t>Metric</a:t>
-                      </a:r>
-                    </a:p>
-                  </a:txBody>
-                  <a:tcPr>
-                    <a:solidFill>
-                      <a:srgbClr val="1F2A44"/>
-                    </a:solidFill>
-                  </a:tcPr>
-                </a:tc>
-                <a:tc>
-                  <a:txBody>
-                    <a:bodyPr/>
-                    <a:lstStyle/>
-                    <a:p>
-                      <a:r>
-                        <a:rPr sz="1300" b="1">
-                          <a:solidFill>
-                            <a:srgbClr val="FFFFFF"/>
-                          </a:solidFill>
-                        </a:rPr>
-                        <a:t>Finding</a:t>
-                      </a:r>
-                    </a:p>
-                  </a:txBody>
-                  <a:tcPr>
-                    <a:solidFill>
-                      <a:srgbClr val="1F2A44"/>
-                    </a:solidFill>
-                  </a:tcPr>
-                </a:tc>
-              </a:tr>
-              <a:tr h="327660">
-                <a:tc>
-                  <a:txBody>
-                    <a:bodyPr/>
-                    <a:lstStyle/>
-                    <a:p>
-                      <a:r>
-                        <a:rPr sz="1100">
-                          <a:solidFill>
-                            <a:srgbClr val="1F2A44"/>
-                          </a:solidFill>
-                        </a:rPr>
-                        <a:t>Styles</a:t>
-                      </a:r>
-                    </a:p>
-                  </a:txBody>
-                  <a:tcPr/>
-                </a:tc>
-                <a:tc>
-                  <a:txBody>
-                    <a:bodyPr/>
-                    <a:lstStyle/>
-                    <a:p>
-                      <a:r>
-                        <a:rPr sz="1100">
-                          <a:solidFill>
-                            <a:srgbClr val="1F2A44"/>
-                          </a:solidFill>
-                        </a:rPr>
-                        <a:t>1,377</a:t>
-                      </a:r>
-                    </a:p>
-                  </a:txBody>
-                  <a:tcPr/>
-                </a:tc>
-              </a:tr>
-              <a:tr h="327660">
-                <a:tc>
-                  <a:txBody>
-                    <a:bodyPr/>
-                    <a:lstStyle/>
-                    <a:p>
-                      <a:r>
-                        <a:rPr sz="1100">
-                          <a:solidFill>
-                            <a:srgbClr val="1F2A44"/>
-                          </a:solidFill>
-                        </a:rPr>
-                        <a:t>SKUs</a:t>
-                      </a:r>
-                    </a:p>
-                  </a:txBody>
-                  <a:tcPr/>
-                </a:tc>
-                <a:tc>
-                  <a:txBody>
-                    <a:bodyPr/>
-                    <a:lstStyle/>
-                    <a:p>
-                      <a:r>
-                        <a:rPr sz="1100">
-                          <a:solidFill>
-                            <a:srgbClr val="1F2A44"/>
-                          </a:solidFill>
-                        </a:rPr>
-                        <a:t>7,195</a:t>
-                      </a:r>
-                    </a:p>
-                  </a:txBody>
-                  <a:tcPr/>
-                </a:tc>
-              </a:tr>
-              <a:tr h="327660">
-                <a:tc>
-                  <a:txBody>
-                    <a:bodyPr/>
-                    <a:lstStyle/>
-                    <a:p>
-                      <a:r>
-                        <a:rPr sz="1100">
-                          <a:solidFill>
-                            <a:srgbClr val="1F2A44"/>
-                          </a:solidFill>
-                        </a:rPr>
-                        <a:t>Sizes</a:t>
-                      </a:r>
-                    </a:p>
-                  </a:txBody>
-                  <a:tcPr/>
-                </a:tc>
-                <a:tc>
-                  <a:txBody>
-                    <a:bodyPr/>
-                    <a:lstStyle/>
-                    <a:p>
-                      <a:r>
-                        <a:rPr sz="1100">
-                          <a:solidFill>
-                            <a:srgbClr val="1F2A44"/>
-                          </a:solidFill>
-                        </a:rPr>
-                        <a:t>11</a:t>
-                      </a:r>
-                    </a:p>
-                  </a:txBody>
-                  <a:tcPr/>
-                </a:tc>
-              </a:tr>
-              <a:tr h="327660">
-                <a:tc>
-                  <a:txBody>
-                    <a:bodyPr/>
-                    <a:lstStyle/>
-                    <a:p>
-                      <a:r>
-                        <a:rPr sz="1100">
-                          <a:solidFill>
-                            <a:srgbClr val="1F2A44"/>
-                          </a:solidFill>
-                        </a:rPr>
-                        <a:t>Styles w/ multiple SKUs</a:t>
-                      </a:r>
-                    </a:p>
-                  </a:txBody>
-                  <a:tcPr/>
-                </a:tc>
-                <a:tc>
-                  <a:txBody>
-                    <a:bodyPr/>
-                    <a:lstStyle/>
-                    <a:p>
-                      <a:r>
-                        <a:rPr sz="1100">
-                          <a:solidFill>
-                            <a:srgbClr val="1F2A44"/>
-                          </a:solidFill>
-                        </a:rPr>
-                        <a:t>1,180</a:t>
-                      </a:r>
-                    </a:p>
-                  </a:txBody>
-                  <a:tcPr/>
-                </a:tc>
-              </a:tr>
-              <a:tr h="327660">
-                <a:tc>
-                  <a:txBody>
-                    <a:bodyPr/>
-                    <a:lstStyle/>
-                    <a:p>
-                      <a:r>
-                        <a:rPr sz="1100">
-                          <a:solidFill>
-                            <a:srgbClr val="1F2A44"/>
-                          </a:solidFill>
-                        </a:rPr>
-                        <a:t>Max SKUs for one style</a:t>
-                      </a:r>
-                    </a:p>
-                  </a:txBody>
-                  <a:tcPr/>
-                </a:tc>
-                <a:tc>
-                  <a:txBody>
-                    <a:bodyPr/>
-                    <a:lstStyle/>
-                    <a:p>
-                      <a:r>
-                        <a:rPr sz="1100">
-                          <a:solidFill>
-                            <a:srgbClr val="1F2A44"/>
-                          </a:solidFill>
-                        </a:rPr>
-                        <a:t>14</a:t>
-                      </a:r>
-                    </a:p>
-                  </a:txBody>
-                  <a:tcPr/>
-                </a:tc>
-              </a:tr>
-            </a:tbl>
-          </a:graphicData>
-        </a:graphic>
-      </p:graphicFrame>
-      <p:sp>
-        <p:nvSpPr>
-          <p:cNvPr id="8" name="TextBox 7"/>
-          <p:cNvSpPr txBox="1"/>
-          <p:nvPr/>
-        </p:nvSpPr>
-        <p:spPr>
-          <a:xfrm>
-            <a:off x="548640" y="5760720"/>
+            <a:off x="548640" y="5852160"/>
             <a:ext cx="10972800" cy="457200"/>
           </a:xfrm>
           <a:prstGeom prst="rect">
@@ -10257,7 +10340,7 @@
                   <a:srgbClr val="C0392B"/>
                 </a:solidFill>
               </a:rPr>
-              <a:t>Fact grain = order × SKU line item. (Order ID, SKU) needs DISTINCT in staging (D2).</a:t>
+              <a:t>Master data is clean. (Order ID, SKU) is almost unique — dedupe required.</a:t>
             </a:r>
           </a:p>
         </p:txBody>
@@ -10270,7 +10353,7 @@
 </p:sld>
 </file>
 
-<file path=ppt/slides/slide5.xml><?xml version="1.0" encoding="utf-8"?>
+<file path=ppt/slides/slide6.xml><?xml version="1.0" encoding="utf-8"?>
 <p:sld xmlns:a="http://schemas.openxmlformats.org/drawingml/2006/main" xmlns:p="http://schemas.openxmlformats.org/presentationml/2006/main" xmlns:r="http://schemas.openxmlformats.org/officeDocument/2006/relationships">
   <p:cSld>
     <p:bg>
@@ -10316,7 +10399,7 @@
                   <a:srgbClr val="1F2A44"/>
                 </a:solidFill>
               </a:rPr>
-              <a:t>Data quality — completeness &amp; uniqueness</a:t>
+              <a:t>Data quality — cross-field &amp; geography</a:t>
             </a:r>
           </a:p>
         </p:txBody>
@@ -10364,17 +10447,136 @@
           </a:p>
         </p:txBody>
       </p:sp>
+      <p:sp>
+        <p:nvSpPr>
+          <p:cNvPr id="4" name="TextBox 3"/>
+          <p:cNvSpPr txBox="1"/>
+          <p:nvPr/>
+        </p:nvSpPr>
+        <p:spPr>
+          <a:xfrm>
+            <a:off x="548640" y="1280160"/>
+            <a:ext cx="5486400" cy="365760"/>
+          </a:xfrm>
+          <a:prstGeom prst="rect">
+            <a:avLst/>
+          </a:prstGeom>
+          <a:noFill/>
+        </p:spPr>
+        <p:txBody>
+          <a:bodyPr wrap="square">
+            <a:spAutoFit/>
+          </a:bodyPr>
+          <a:lstStyle/>
+          <a:p>
+            <a:r>
+              <a:rPr sz="1500" b="1" i="0">
+                <a:solidFill>
+                  <a:srgbClr val="1F2A44"/>
+                </a:solidFill>
+              </a:rPr>
+              <a:t>Amount / currency null pattern</a:t>
+            </a:r>
+          </a:p>
+        </p:txBody>
+      </p:sp>
+      <p:sp>
+        <p:nvSpPr>
+          <p:cNvPr id="5" name="TextBox 4"/>
+          <p:cNvSpPr txBox="1"/>
+          <p:nvPr/>
+        </p:nvSpPr>
+        <p:spPr>
+          <a:xfrm>
+            <a:off x="548640" y="1691640"/>
+            <a:ext cx="11064240" cy="4983480"/>
+          </a:xfrm>
+          <a:prstGeom prst="rect">
+            <a:avLst/>
+          </a:prstGeom>
+          <a:noFill/>
+        </p:spPr>
+        <p:txBody>
+          <a:bodyPr wrap="square">
+            <a:spAutoFit/>
+          </a:bodyPr>
+          <a:lstStyle/>
+          <a:p>
+            <a:pPr>
+              <a:spcAft>
+                <a:spcPts val="400"/>
+              </a:spcAft>
+            </a:pPr>
+            <a:r>
+              <a:rPr sz="1300">
+                <a:solidFill>
+                  <a:srgbClr val="1F2A44"/>
+                </a:solidFill>
+              </a:rPr>
+              <a:t>• Both NULL: 7,795  ·  Only Amount NULL: 0  ·  Only currency NULL: 0</a:t>
+            </a:r>
+          </a:p>
+          <a:p>
+            <a:pPr>
+              <a:spcAft>
+                <a:spcPts val="400"/>
+              </a:spcAft>
+            </a:pPr>
+            <a:r>
+              <a:rPr sz="1300">
+                <a:solidFill>
+                  <a:srgbClr val="1F2A44"/>
+                </a:solidFill>
+              </a:rPr>
+              <a:t>• Perfectly correlated → drop `currency` (D4)</a:t>
+            </a:r>
+          </a:p>
+        </p:txBody>
+      </p:sp>
+      <p:sp>
+        <p:nvSpPr>
+          <p:cNvPr id="6" name="TextBox 5"/>
+          <p:cNvSpPr txBox="1"/>
+          <p:nvPr/>
+        </p:nvSpPr>
+        <p:spPr>
+          <a:xfrm>
+            <a:off x="548640" y="2514600"/>
+            <a:ext cx="5486400" cy="365760"/>
+          </a:xfrm>
+          <a:prstGeom prst="rect">
+            <a:avLst/>
+          </a:prstGeom>
+          <a:noFill/>
+        </p:spPr>
+        <p:txBody>
+          <a:bodyPr wrap="square">
+            <a:spAutoFit/>
+          </a:bodyPr>
+          <a:lstStyle/>
+          <a:p>
+            <a:r>
+              <a:rPr sz="1500" b="1" i="0">
+                <a:solidFill>
+                  <a:srgbClr val="1F2A44"/>
+                </a:solidFill>
+              </a:rPr>
+              <a:t>Fulfilment ↔ fulfilled-by</a:t>
+            </a:r>
+          </a:p>
+        </p:txBody>
+      </p:sp>
       <p:graphicFrame>
         <p:nvGraphicFramePr>
-          <p:cNvPr id="4" name="Table 3"/>
+          <p:cNvPr id="7" name="Table 6"/>
           <p:cNvGraphicFramePr>
             <a:graphicFrameLocks noGrp="1"/>
           </p:cNvGraphicFramePr>
           <p:nvPr/>
         </p:nvGraphicFramePr>
         <p:xfrm>
-          <a:off x="548640" y="1280160"/>
-          <a:ext cx="11064240" cy="2843784"/>
+          <a:off x="548640" y="2926080"/>
+          <a:ext cx="5669280" cy="1088136"/>
         </p:xfrm>
         <a:graphic>
           <a:graphicData uri="http://schemas.openxmlformats.org/drawingml/2006/table">
@@ -10383,10 +10585,11 @@
                 <a:tableStyleId>{5C22544A-7EE6-4342-B048-85BDC9FD1C3A}</a:tableStyleId>
               </a:tblPr>
               <a:tblGrid>
-                <a:gridCol w="7772400"/>
-                <a:gridCol w="3291840"/>
+                <a:gridCol w="2103120"/>
+                <a:gridCol w="2103120"/>
+                <a:gridCol w="1463040"/>
               </a:tblGrid>
-              <a:tr h="315976">
+              <a:tr h="362712">
                 <a:tc>
                   <a:txBody>
                     <a:bodyPr/>
@@ -10398,7 +10601,7 @@
                             <a:srgbClr val="FFFFFF"/>
                           </a:solidFill>
                         </a:rPr>
-                        <a:t>Check</a:t>
+                        <a:t>Fulfilment</a:t>
                       </a:r>
                     </a:p>
                   </a:txBody>
@@ -10419,7 +10622,7 @@
                             <a:srgbClr val="FFFFFF"/>
                           </a:solidFill>
                         </a:rPr>
-                        <a:t>Result</a:t>
+                        <a:t>fulfilled-by</a:t>
                       </a:r>
                     </a:p>
                   </a:txBody>
@@ -10429,289 +10632,128 @@
                     </a:solidFill>
                   </a:tcPr>
                 </a:tc>
+                <a:tc>
+                  <a:txBody>
+                    <a:bodyPr/>
+                    <a:lstStyle/>
+                    <a:p>
+                      <a:r>
+                        <a:rPr sz="1300" b="1">
+                          <a:solidFill>
+                            <a:srgbClr val="FFFFFF"/>
+                          </a:solidFill>
+                        </a:rPr>
+                        <a:t>count</a:t>
+                      </a:r>
+                    </a:p>
+                  </a:txBody>
+                  <a:tcPr>
+                    <a:solidFill>
+                      <a:srgbClr val="1F2A44"/>
+                    </a:solidFill>
+                  </a:tcPr>
+                </a:tc>
               </a:tr>
-              <a:tr h="315976">
-                <a:tc>
-                  <a:txBody>
-                    <a:bodyPr/>
-                    <a:lstStyle/>
-                    <a:p>
-                      <a:r>
-                        <a:rPr sz="1100">
-                          <a:solidFill>
-                            <a:srgbClr val="1F2A44"/>
-                          </a:solidFill>
-                        </a:rPr>
-                        <a:t>Business-level exact duplicate rows (excl. `index`)</a:t>
-                      </a:r>
-                    </a:p>
-                  </a:txBody>
-                  <a:tcPr/>
-                </a:tc>
-                <a:tc>
-                  <a:txBody>
-                    <a:bodyPr/>
-                    <a:lstStyle/>
-                    <a:p>
-                      <a:r>
-                        <a:rPr sz="1100">
-                          <a:solidFill>
-                            <a:srgbClr val="1F2A44"/>
-                          </a:solidFill>
-                        </a:rPr>
-                        <a:t>6</a:t>
+              <a:tr h="362712">
+                <a:tc>
+                  <a:txBody>
+                    <a:bodyPr/>
+                    <a:lstStyle/>
+                    <a:p>
+                      <a:r>
+                        <a:rPr sz="1100">
+                          <a:solidFill>
+                            <a:srgbClr val="1F2A44"/>
+                          </a:solidFill>
+                        </a:rPr>
+                        <a:t>Fashionable</a:t>
+                      </a:r>
+                    </a:p>
+                  </a:txBody>
+                  <a:tcPr/>
+                </a:tc>
+                <a:tc>
+                  <a:txBody>
+                    <a:bodyPr/>
+                    <a:lstStyle/>
+                    <a:p>
+                      <a:r>
+                        <a:rPr sz="1100">
+                          <a:solidFill>
+                            <a:srgbClr val="1F2A44"/>
+                          </a:solidFill>
+                        </a:rPr>
+                        <a:t>&lt;NULL&gt;</a:t>
+                      </a:r>
+                    </a:p>
+                  </a:txBody>
+                  <a:tcPr/>
+                </a:tc>
+                <a:tc>
+                  <a:txBody>
+                    <a:bodyPr/>
+                    <a:lstStyle/>
+                    <a:p>
+                      <a:r>
+                        <a:rPr sz="1100">
+                          <a:solidFill>
+                            <a:srgbClr val="1F2A44"/>
+                          </a:solidFill>
+                        </a:rPr>
+                        <a:t>89,698</a:t>
                       </a:r>
                     </a:p>
                   </a:txBody>
                   <a:tcPr/>
                 </a:tc>
               </a:tr>
-              <a:tr h="315976">
-                <a:tc>
-                  <a:txBody>
-                    <a:bodyPr/>
-                    <a:lstStyle/>
-                    <a:p>
-                      <a:r>
-                        <a:rPr sz="1100">
-                          <a:solidFill>
-                            <a:srgbClr val="1F2A44"/>
-                          </a:solidFill>
-                        </a:rPr>
-                        <a:t>Missing Amount</a:t>
-                      </a:r>
-                    </a:p>
-                  </a:txBody>
-                  <a:tcPr/>
-                </a:tc>
-                <a:tc>
-                  <a:txBody>
-                    <a:bodyPr/>
-                    <a:lstStyle/>
-                    <a:p>
-                      <a:r>
-                        <a:rPr sz="1100">
-                          <a:solidFill>
-                            <a:srgbClr val="1F2A44"/>
-                          </a:solidFill>
-                        </a:rPr>
-                        <a:t>7,795</a:t>
-                      </a:r>
-                    </a:p>
-                  </a:txBody>
-                  <a:tcPr/>
-                </a:tc>
-              </a:tr>
-              <a:tr h="315976">
-                <a:tc>
-                  <a:txBody>
-                    <a:bodyPr/>
-                    <a:lstStyle/>
-                    <a:p>
-                      <a:r>
-                        <a:rPr sz="1100">
-                          <a:solidFill>
-                            <a:srgbClr val="1F2A44"/>
-                          </a:solidFill>
-                        </a:rPr>
-                        <a:t>Qty = 0</a:t>
-                      </a:r>
-                    </a:p>
-                  </a:txBody>
-                  <a:tcPr/>
-                </a:tc>
-                <a:tc>
-                  <a:txBody>
-                    <a:bodyPr/>
-                    <a:lstStyle/>
-                    <a:p>
-                      <a:r>
-                        <a:rPr sz="1100">
-                          <a:solidFill>
-                            <a:srgbClr val="1F2A44"/>
-                          </a:solidFill>
-                        </a:rPr>
-                        <a:t>12,807</a:t>
-                      </a:r>
-                    </a:p>
-                  </a:txBody>
-                  <a:tcPr/>
-                </a:tc>
-              </a:tr>
-              <a:tr h="315976">
-                <a:tc>
-                  <a:txBody>
-                    <a:bodyPr/>
-                    <a:lstStyle/>
-                    <a:p>
-                      <a:r>
-                        <a:rPr sz="1100">
-                          <a:solidFill>
-                            <a:srgbClr val="1F2A44"/>
-                          </a:solidFill>
-                        </a:rPr>
-                        <a:t>Negative Qty / Negative Amount</a:t>
-                      </a:r>
-                    </a:p>
-                  </a:txBody>
-                  <a:tcPr/>
-                </a:tc>
-                <a:tc>
-                  <a:txBody>
-                    <a:bodyPr/>
-                    <a:lstStyle/>
-                    <a:p>
-                      <a:r>
-                        <a:rPr sz="1100">
-                          <a:solidFill>
-                            <a:srgbClr val="1F2A44"/>
-                          </a:solidFill>
-                        </a:rPr>
-                        <a:t>0 / 0</a:t>
-                      </a:r>
-                    </a:p>
-                  </a:txBody>
-                  <a:tcPr/>
-                </a:tc>
-              </a:tr>
-              <a:tr h="315976">
-                <a:tc>
-                  <a:txBody>
-                    <a:bodyPr/>
-                    <a:lstStyle/>
-                    <a:p>
-                      <a:r>
-                        <a:rPr sz="1100">
-                          <a:solidFill>
-                            <a:srgbClr val="1F2A44"/>
-                          </a:solidFill>
-                        </a:rPr>
-                        <a:t>Invalid dates (format %m-%d-%y)</a:t>
-                      </a:r>
-                    </a:p>
-                  </a:txBody>
-                  <a:tcPr/>
-                </a:tc>
-                <a:tc>
-                  <a:txBody>
-                    <a:bodyPr/>
-                    <a:lstStyle/>
-                    <a:p>
-                      <a:r>
-                        <a:rPr sz="1100">
-                          <a:solidFill>
-                            <a:srgbClr val="1F2A44"/>
-                          </a:solidFill>
-                        </a:rPr>
-                        <a:t>0</a:t>
-                      </a:r>
-                    </a:p>
-                  </a:txBody>
-                  <a:tcPr/>
-                </a:tc>
-              </a:tr>
-              <a:tr h="315976">
-                <a:tc>
-                  <a:txBody>
-                    <a:bodyPr/>
-                    <a:lstStyle/>
-                    <a:p>
-                      <a:r>
-                        <a:rPr sz="1100">
-                          <a:solidFill>
-                            <a:srgbClr val="1F2A44"/>
-                          </a:solidFill>
-                        </a:rPr>
-                        <a:t>Missing shipping info</a:t>
-                      </a:r>
-                    </a:p>
-                  </a:txBody>
-                  <a:tcPr/>
-                </a:tc>
-                <a:tc>
-                  <a:txBody>
-                    <a:bodyPr/>
-                    <a:lstStyle/>
-                    <a:p>
-                      <a:r>
-                        <a:rPr sz="1100">
-                          <a:solidFill>
-                            <a:srgbClr val="1F2A44"/>
-                          </a:solidFill>
-                        </a:rPr>
-                        <a:t>33</a:t>
-                      </a:r>
-                    </a:p>
-                  </a:txBody>
-                  <a:tcPr/>
-                </a:tc>
-              </a:tr>
-              <a:tr h="315976">
-                <a:tc>
-                  <a:txBody>
-                    <a:bodyPr/>
-                    <a:lstStyle/>
-                    <a:p>
-                      <a:r>
-                        <a:rPr sz="1100">
-                          <a:solidFill>
-                            <a:srgbClr val="1F2A44"/>
-                          </a:solidFill>
-                        </a:rPr>
-                        <a:t>SKU → Style / Category / Size drift</a:t>
-                      </a:r>
-                    </a:p>
-                  </a:txBody>
-                  <a:tcPr/>
-                </a:tc>
-                <a:tc>
-                  <a:txBody>
-                    <a:bodyPr/>
-                    <a:lstStyle/>
-                    <a:p>
-                      <a:r>
-                        <a:rPr sz="1100">
-                          <a:solidFill>
-                            <a:srgbClr val="1F2A44"/>
-                          </a:solidFill>
-                        </a:rPr>
-                        <a:t>0 / 0 / 0</a:t>
-                      </a:r>
-                    </a:p>
-                  </a:txBody>
-                  <a:tcPr/>
-                </a:tc>
-              </a:tr>
-              <a:tr h="315976">
-                <a:tc>
-                  <a:txBody>
-                    <a:bodyPr/>
-                    <a:lstStyle/>
-                    <a:p>
-                      <a:r>
-                        <a:rPr sz="1100">
-                          <a:solidFill>
-                            <a:srgbClr val="1F2A44"/>
-                          </a:solidFill>
-                        </a:rPr>
-                        <a:t>Status ↔ Courier Status contradictions</a:t>
-                      </a:r>
-                    </a:p>
-                  </a:txBody>
-                  <a:tcPr/>
-                </a:tc>
-                <a:tc>
-                  <a:txBody>
-                    <a:bodyPr/>
-                    <a:lstStyle/>
-                    <a:p>
-                      <a:r>
-                        <a:rPr sz="1100">
-                          <a:solidFill>
-                            <a:srgbClr val="1F2A44"/>
-                          </a:solidFill>
-                        </a:rPr>
-                        <a:t>218 (0.17%)</a:t>
+              <a:tr h="362712">
+                <a:tc>
+                  <a:txBody>
+                    <a:bodyPr/>
+                    <a:lstStyle/>
+                    <a:p>
+                      <a:r>
+                        <a:rPr sz="1100">
+                          <a:solidFill>
+                            <a:srgbClr val="1F2A44"/>
+                          </a:solidFill>
+                        </a:rPr>
+                        <a:t>Merchant</a:t>
+                      </a:r>
+                    </a:p>
+                  </a:txBody>
+                  <a:tcPr/>
+                </a:tc>
+                <a:tc>
+                  <a:txBody>
+                    <a:bodyPr/>
+                    <a:lstStyle/>
+                    <a:p>
+                      <a:r>
+                        <a:rPr sz="1100">
+                          <a:solidFill>
+                            <a:srgbClr val="1F2A44"/>
+                          </a:solidFill>
+                        </a:rPr>
+                        <a:t>Easy Ship</a:t>
+                      </a:r>
+                    </a:p>
+                  </a:txBody>
+                  <a:tcPr/>
+                </a:tc>
+                <a:tc>
+                  <a:txBody>
+                    <a:bodyPr/>
+                    <a:lstStyle/>
+                    <a:p>
+                      <a:r>
+                        <a:rPr sz="1100">
+                          <a:solidFill>
+                            <a:srgbClr val="1F2A44"/>
+                          </a:solidFill>
+                        </a:rPr>
+                        <a:t>39,277</a:t>
                       </a:r>
                     </a:p>
                   </a:txBody>
@@ -10724,14 +10766,14 @@
       </p:graphicFrame>
       <p:sp>
         <p:nvSpPr>
-          <p:cNvPr id="5" name="TextBox 4"/>
+          <p:cNvPr id="8" name="TextBox 7"/>
           <p:cNvSpPr txBox="1"/>
           <p:nvPr/>
         </p:nvSpPr>
         <p:spPr>
           <a:xfrm>
-            <a:off x="548640" y="5852160"/>
-            <a:ext cx="10972800" cy="457200"/>
+            <a:off x="6400800" y="1280160"/>
+            <a:ext cx="5486400" cy="365760"/>
           </a:xfrm>
           <a:prstGeom prst="rect">
             <a:avLst/>
@@ -10745,12 +10787,369 @@
           <a:lstStyle/>
           <a:p>
             <a:r>
-              <a:rPr sz="1300" b="0" i="1">
-                <a:solidFill>
-                  <a:srgbClr val="C0392B"/>
-                </a:solidFill>
-              </a:rPr>
-              <a:t>Master data is clean. (Order ID, SKU) is almost unique — dedupe required.</a:t>
+              <a:rPr sz="1500" b="1" i="0">
+                <a:solidFill>
+                  <a:srgbClr val="1F2A44"/>
+                </a:solidFill>
+              </a:rPr>
+              <a:t>Casing collapse (D7)</a:t>
+            </a:r>
+          </a:p>
+        </p:txBody>
+      </p:sp>
+      <p:graphicFrame>
+        <p:nvGraphicFramePr>
+          <p:cNvPr id="9" name="Table 8"/>
+          <p:cNvGraphicFramePr>
+            <a:graphicFrameLocks noGrp="1"/>
+          </p:cNvGraphicFramePr>
+          <p:nvPr/>
+        </p:nvGraphicFramePr>
+        <p:xfrm>
+          <a:off x="6400800" y="1691640"/>
+          <a:ext cx="5212080" cy="1380744"/>
+        </p:xfrm>
+        <a:graphic>
+          <a:graphicData uri="http://schemas.openxmlformats.org/drawingml/2006/table">
+            <a:tbl>
+              <a:tblPr firstRow="1" bandRow="1">
+                <a:tableStyleId>{5C22544A-7EE6-4342-B048-85BDC9FD1C3A}</a:tableStyleId>
+              </a:tblPr>
+              <a:tblGrid>
+                <a:gridCol w="1828800"/>
+                <a:gridCol w="1097280"/>
+                <a:gridCol w="1371600"/>
+                <a:gridCol w="914400"/>
+              </a:tblGrid>
+              <a:tr h="345186">
+                <a:tc>
+                  <a:txBody>
+                    <a:bodyPr/>
+                    <a:lstStyle/>
+                    <a:p>
+                      <a:r>
+                        <a:rPr sz="1300" b="1">
+                          <a:solidFill>
+                            <a:srgbClr val="FFFFFF"/>
+                          </a:solidFill>
+                        </a:rPr>
+                        <a:t>Column</a:t>
+                      </a:r>
+                    </a:p>
+                  </a:txBody>
+                  <a:tcPr>
+                    <a:solidFill>
+                      <a:srgbClr val="1F2A44"/>
+                    </a:solidFill>
+                  </a:tcPr>
+                </a:tc>
+                <a:tc>
+                  <a:txBody>
+                    <a:bodyPr/>
+                    <a:lstStyle/>
+                    <a:p>
+                      <a:r>
+                        <a:rPr sz="1300" b="1">
+                          <a:solidFill>
+                            <a:srgbClr val="FFFFFF"/>
+                          </a:solidFill>
+                        </a:rPr>
+                        <a:t>Raw</a:t>
+                      </a:r>
+                    </a:p>
+                  </a:txBody>
+                  <a:tcPr>
+                    <a:solidFill>
+                      <a:srgbClr val="1F2A44"/>
+                    </a:solidFill>
+                  </a:tcPr>
+                </a:tc>
+                <a:tc>
+                  <a:txBody>
+                    <a:bodyPr/>
+                    <a:lstStyle/>
+                    <a:p>
+                      <a:r>
+                        <a:rPr sz="1300" b="1">
+                          <a:solidFill>
+                            <a:srgbClr val="FFFFFF"/>
+                          </a:solidFill>
+                        </a:rPr>
+                        <a:t>Normalized</a:t>
+                      </a:r>
+                    </a:p>
+                  </a:txBody>
+                  <a:tcPr>
+                    <a:solidFill>
+                      <a:srgbClr val="1F2A44"/>
+                    </a:solidFill>
+                  </a:tcPr>
+                </a:tc>
+                <a:tc>
+                  <a:txBody>
+                    <a:bodyPr/>
+                    <a:lstStyle/>
+                    <a:p>
+                      <a:r>
+                        <a:rPr sz="1300" b="1">
+                          <a:solidFill>
+                            <a:srgbClr val="FFFFFF"/>
+                          </a:solidFill>
+                        </a:rPr>
+                        <a:t>% dup</a:t>
+                      </a:r>
+                    </a:p>
+                  </a:txBody>
+                  <a:tcPr>
+                    <a:solidFill>
+                      <a:srgbClr val="1F2A44"/>
+                    </a:solidFill>
+                  </a:tcPr>
+                </a:tc>
+              </a:tr>
+              <a:tr h="345186">
+                <a:tc>
+                  <a:txBody>
+                    <a:bodyPr/>
+                    <a:lstStyle/>
+                    <a:p>
+                      <a:r>
+                        <a:rPr sz="1100">
+                          <a:solidFill>
+                            <a:srgbClr val="1F2A44"/>
+                          </a:solidFill>
+                        </a:rPr>
+                        <a:t>ship-city</a:t>
+                      </a:r>
+                    </a:p>
+                  </a:txBody>
+                  <a:tcPr/>
+                </a:tc>
+                <a:tc>
+                  <a:txBody>
+                    <a:bodyPr/>
+                    <a:lstStyle/>
+                    <a:p>
+                      <a:r>
+                        <a:rPr sz="1100">
+                          <a:solidFill>
+                            <a:srgbClr val="1F2A44"/>
+                          </a:solidFill>
+                        </a:rPr>
+                        <a:t>8,955</a:t>
+                      </a:r>
+                    </a:p>
+                  </a:txBody>
+                  <a:tcPr/>
+                </a:tc>
+                <a:tc>
+                  <a:txBody>
+                    <a:bodyPr/>
+                    <a:lstStyle/>
+                    <a:p>
+                      <a:r>
+                        <a:rPr sz="1100">
+                          <a:solidFill>
+                            <a:srgbClr val="1F2A44"/>
+                          </a:solidFill>
+                        </a:rPr>
+                        <a:t>7,297</a:t>
+                      </a:r>
+                    </a:p>
+                  </a:txBody>
+                  <a:tcPr/>
+                </a:tc>
+                <a:tc>
+                  <a:txBody>
+                    <a:bodyPr/>
+                    <a:lstStyle/>
+                    <a:p>
+                      <a:r>
+                        <a:rPr sz="1100">
+                          <a:solidFill>
+                            <a:srgbClr val="1F2A44"/>
+                          </a:solidFill>
+                        </a:rPr>
+                        <a:t>19%</a:t>
+                      </a:r>
+                    </a:p>
+                  </a:txBody>
+                  <a:tcPr/>
+                </a:tc>
+              </a:tr>
+              <a:tr h="345186">
+                <a:tc>
+                  <a:txBody>
+                    <a:bodyPr/>
+                    <a:lstStyle/>
+                    <a:p>
+                      <a:r>
+                        <a:rPr sz="1100">
+                          <a:solidFill>
+                            <a:srgbClr val="1F2A44"/>
+                          </a:solidFill>
+                        </a:rPr>
+                        <a:t>ship-state</a:t>
+                      </a:r>
+                    </a:p>
+                  </a:txBody>
+                  <a:tcPr/>
+                </a:tc>
+                <a:tc>
+                  <a:txBody>
+                    <a:bodyPr/>
+                    <a:lstStyle/>
+                    <a:p>
+                      <a:r>
+                        <a:rPr sz="1100">
+                          <a:solidFill>
+                            <a:srgbClr val="1F2A44"/>
+                          </a:solidFill>
+                        </a:rPr>
+                        <a:t>69</a:t>
+                      </a:r>
+                    </a:p>
+                  </a:txBody>
+                  <a:tcPr/>
+                </a:tc>
+                <a:tc>
+                  <a:txBody>
+                    <a:bodyPr/>
+                    <a:lstStyle/>
+                    <a:p>
+                      <a:r>
+                        <a:rPr sz="1100">
+                          <a:solidFill>
+                            <a:srgbClr val="1F2A44"/>
+                          </a:solidFill>
+                        </a:rPr>
+                        <a:t>47</a:t>
+                      </a:r>
+                    </a:p>
+                  </a:txBody>
+                  <a:tcPr/>
+                </a:tc>
+                <a:tc>
+                  <a:txBody>
+                    <a:bodyPr/>
+                    <a:lstStyle/>
+                    <a:p>
+                      <a:r>
+                        <a:rPr sz="1100">
+                          <a:solidFill>
+                            <a:srgbClr val="1F2A44"/>
+                          </a:solidFill>
+                        </a:rPr>
+                        <a:t>32%</a:t>
+                      </a:r>
+                    </a:p>
+                  </a:txBody>
+                  <a:tcPr/>
+                </a:tc>
+              </a:tr>
+              <a:tr h="345186">
+                <a:tc>
+                  <a:txBody>
+                    <a:bodyPr/>
+                    <a:lstStyle/>
+                    <a:p>
+                      <a:r>
+                        <a:rPr sz="1100">
+                          <a:solidFill>
+                            <a:srgbClr val="1F2A44"/>
+                          </a:solidFill>
+                        </a:rPr>
+                        <a:t>ship-country</a:t>
+                      </a:r>
+                    </a:p>
+                  </a:txBody>
+                  <a:tcPr/>
+                </a:tc>
+                <a:tc>
+                  <a:txBody>
+                    <a:bodyPr/>
+                    <a:lstStyle/>
+                    <a:p>
+                      <a:r>
+                        <a:rPr sz="1100">
+                          <a:solidFill>
+                            <a:srgbClr val="1F2A44"/>
+                          </a:solidFill>
+                        </a:rPr>
+                        <a:t>1</a:t>
+                      </a:r>
+                    </a:p>
+                  </a:txBody>
+                  <a:tcPr/>
+                </a:tc>
+                <a:tc>
+                  <a:txBody>
+                    <a:bodyPr/>
+                    <a:lstStyle/>
+                    <a:p>
+                      <a:r>
+                        <a:rPr sz="1100">
+                          <a:solidFill>
+                            <a:srgbClr val="1F2A44"/>
+                          </a:solidFill>
+                        </a:rPr>
+                        <a:t>1</a:t>
+                      </a:r>
+                    </a:p>
+                  </a:txBody>
+                  <a:tcPr/>
+                </a:tc>
+                <a:tc>
+                  <a:txBody>
+                    <a:bodyPr/>
+                    <a:lstStyle/>
+                    <a:p>
+                      <a:r>
+                        <a:rPr sz="1100">
+                          <a:solidFill>
+                            <a:srgbClr val="1F2A44"/>
+                          </a:solidFill>
+                        </a:rPr>
+                        <a:t>0%</a:t>
+                      </a:r>
+                    </a:p>
+                  </a:txBody>
+                  <a:tcPr/>
+                </a:tc>
+              </a:tr>
+            </a:tbl>
+          </a:graphicData>
+        </a:graphic>
+      </p:graphicFrame>
+      <p:sp>
+        <p:nvSpPr>
+          <p:cNvPr id="10" name="TextBox 9"/>
+          <p:cNvSpPr txBox="1"/>
+          <p:nvPr/>
+        </p:nvSpPr>
+        <p:spPr>
+          <a:xfrm>
+            <a:off x="6400800" y="3383280"/>
+            <a:ext cx="5212080" cy="914400"/>
+          </a:xfrm>
+          <a:prstGeom prst="rect">
+            <a:avLst/>
+          </a:prstGeom>
+          <a:noFill/>
+        </p:spPr>
+        <p:txBody>
+          <a:bodyPr wrap="square">
+            <a:spAutoFit/>
+          </a:bodyPr>
+          <a:lstStyle/>
+          <a:p>
+            <a:r>
+              <a:rPr sz="1200" b="0" i="1">
+                <a:solidFill>
+                  <a:srgbClr val="6C757D"/>
+                </a:solidFill>
+              </a:rPr>
+              <a:t>India has 36 states + UTs officially — even normalized we see 47 (residual misspellings).</a:t>
             </a:r>
           </a:p>
         </p:txBody>
@@ -10763,7 +11162,7 @@
 </p:sld>
 </file>
 
-<file path=ppt/slides/slide6.xml><?xml version="1.0" encoding="utf-8"?>
+<file path=ppt/slides/slide7.xml><?xml version="1.0" encoding="utf-8"?>
 <p:sld xmlns:a="http://schemas.openxmlformats.org/drawingml/2006/main" xmlns:p="http://schemas.openxmlformats.org/presentationml/2006/main" xmlns:r="http://schemas.openxmlformats.org/officeDocument/2006/relationships">
   <p:cSld>
     <p:bg>
@@ -10809,7 +11208,7 @@
                   <a:srgbClr val="1F2A44"/>
                 </a:solidFill>
               </a:rPr>
-              <a:t>Data quality — cross-field &amp; geography</a:t>
+              <a:t>Not every anomaly is bad data</a:t>
             </a:r>
           </a:p>
         </p:txBody>
@@ -10857,136 +11256,17 @@
           </a:p>
         </p:txBody>
       </p:sp>
-      <p:sp>
-        <p:nvSpPr>
-          <p:cNvPr id="4" name="TextBox 3"/>
-          <p:cNvSpPr txBox="1"/>
-          <p:nvPr/>
-        </p:nvSpPr>
-        <p:spPr>
-          <a:xfrm>
-            <a:off x="548640" y="1280160"/>
-            <a:ext cx="5486400" cy="365760"/>
-          </a:xfrm>
-          <a:prstGeom prst="rect">
-            <a:avLst/>
-          </a:prstGeom>
-          <a:noFill/>
-        </p:spPr>
-        <p:txBody>
-          <a:bodyPr wrap="square">
-            <a:spAutoFit/>
-          </a:bodyPr>
-          <a:lstStyle/>
-          <a:p>
-            <a:r>
-              <a:rPr sz="1500" b="1" i="0">
-                <a:solidFill>
-                  <a:srgbClr val="1F2A44"/>
-                </a:solidFill>
-              </a:rPr>
-              <a:t>Amount / currency null pattern</a:t>
-            </a:r>
-          </a:p>
-        </p:txBody>
-      </p:sp>
-      <p:sp>
-        <p:nvSpPr>
-          <p:cNvPr id="5" name="TextBox 4"/>
-          <p:cNvSpPr txBox="1"/>
-          <p:nvPr/>
-        </p:nvSpPr>
-        <p:spPr>
-          <a:xfrm>
-            <a:off x="548640" y="1691640"/>
-            <a:ext cx="11064240" cy="4983480"/>
-          </a:xfrm>
-          <a:prstGeom prst="rect">
-            <a:avLst/>
-          </a:prstGeom>
-          <a:noFill/>
-        </p:spPr>
-        <p:txBody>
-          <a:bodyPr wrap="square">
-            <a:spAutoFit/>
-          </a:bodyPr>
-          <a:lstStyle/>
-          <a:p>
-            <a:pPr>
-              <a:spcAft>
-                <a:spcPts val="400"/>
-              </a:spcAft>
-            </a:pPr>
-            <a:r>
-              <a:rPr sz="1300">
-                <a:solidFill>
-                  <a:srgbClr val="1F2A44"/>
-                </a:solidFill>
-              </a:rPr>
-              <a:t>• Both NULL: 7,795  ·  Only Amount NULL: 0  ·  Only currency NULL: 0</a:t>
-            </a:r>
-          </a:p>
-          <a:p>
-            <a:pPr>
-              <a:spcAft>
-                <a:spcPts val="400"/>
-              </a:spcAft>
-            </a:pPr>
-            <a:r>
-              <a:rPr sz="1300">
-                <a:solidFill>
-                  <a:srgbClr val="1F2A44"/>
-                </a:solidFill>
-              </a:rPr>
-              <a:t>• Perfectly correlated → drop `currency` (D4)</a:t>
-            </a:r>
-          </a:p>
-        </p:txBody>
-      </p:sp>
-      <p:sp>
-        <p:nvSpPr>
-          <p:cNvPr id="6" name="TextBox 5"/>
-          <p:cNvSpPr txBox="1"/>
-          <p:nvPr/>
-        </p:nvSpPr>
-        <p:spPr>
-          <a:xfrm>
-            <a:off x="548640" y="2514600"/>
-            <a:ext cx="5486400" cy="365760"/>
-          </a:xfrm>
-          <a:prstGeom prst="rect">
-            <a:avLst/>
-          </a:prstGeom>
-          <a:noFill/>
-        </p:spPr>
-        <p:txBody>
-          <a:bodyPr wrap="square">
-            <a:spAutoFit/>
-          </a:bodyPr>
-          <a:lstStyle/>
-          <a:p>
-            <a:r>
-              <a:rPr sz="1500" b="1" i="0">
-                <a:solidFill>
-                  <a:srgbClr val="1F2A44"/>
-                </a:solidFill>
-              </a:rPr>
-              <a:t>Fulfilment ↔ fulfilled-by</a:t>
-            </a:r>
-          </a:p>
-        </p:txBody>
-      </p:sp>
       <p:graphicFrame>
         <p:nvGraphicFramePr>
-          <p:cNvPr id="7" name="Table 6"/>
+          <p:cNvPr id="4" name="Table 3"/>
           <p:cNvGraphicFramePr>
             <a:graphicFrameLocks noGrp="1"/>
           </p:cNvGraphicFramePr>
           <p:nvPr/>
         </p:nvGraphicFramePr>
         <p:xfrm>
-          <a:off x="548640" y="2926080"/>
-          <a:ext cx="5669280" cy="1088136"/>
+          <a:off x="548640" y="1280160"/>
+          <a:ext cx="11064240" cy="1088136"/>
         </p:xfrm>
         <a:graphic>
           <a:graphicData uri="http://schemas.openxmlformats.org/drawingml/2006/table">
@@ -10995,9 +11275,10 @@
                 <a:tableStyleId>{5C22544A-7EE6-4342-B048-85BDC9FD1C3A}</a:tableStyleId>
               </a:tblPr>
               <a:tblGrid>
-                <a:gridCol w="2103120"/>
-                <a:gridCol w="2103120"/>
-                <a:gridCol w="1463040"/>
+                <a:gridCol w="4114800"/>
+                <a:gridCol w="2286000"/>
+                <a:gridCol w="2286000"/>
+                <a:gridCol w="2377440"/>
               </a:tblGrid>
               <a:tr h="362712">
                 <a:tc>
@@ -11011,7 +11292,7 @@
                             <a:srgbClr val="FFFFFF"/>
                           </a:solidFill>
                         </a:rPr>
-                        <a:t>Fulfilment</a:t>
+                        <a:t>Condition</a:t>
                       </a:r>
                     </a:p>
                   </a:txBody>
@@ -11032,7 +11313,7 @@
                             <a:srgbClr val="FFFFFF"/>
                           </a:solidFill>
                         </a:rPr>
-                        <a:t>fulfilled-by</a:t>
+                        <a:t>Total</a:t>
                       </a:r>
                     </a:p>
                   </a:txBody>
@@ -11053,7 +11334,7 @@
                             <a:srgbClr val="FFFFFF"/>
                           </a:solidFill>
                         </a:rPr>
-                        <a:t>count</a:t>
+                        <a:t>Cancelled</a:t>
                       </a:r>
                     </a:p>
                   </a:txBody>
@@ -11063,6 +11344,27 @@
                     </a:solidFill>
                   </a:tcPr>
                 </a:tc>
+                <a:tc>
+                  <a:txBody>
+                    <a:bodyPr/>
+                    <a:lstStyle/>
+                    <a:p>
+                      <a:r>
+                        <a:rPr sz="1300" b="1">
+                          <a:solidFill>
+                            <a:srgbClr val="FFFFFF"/>
+                          </a:solidFill>
+                        </a:rPr>
+                        <a:t>Shipped</a:t>
+                      </a:r>
+                    </a:p>
+                  </a:txBody>
+                  <a:tcPr>
+                    <a:solidFill>
+                      <a:srgbClr val="1F2A44"/>
+                    </a:solidFill>
+                  </a:tcPr>
+                </a:tc>
               </a:tr>
               <a:tr h="362712">
                 <a:tc>
@@ -11076,41 +11378,58 @@
                             <a:srgbClr val="1F2A44"/>
                           </a:solidFill>
                         </a:rPr>
-                        <a:t>Fashionable</a:t>
-                      </a:r>
-                    </a:p>
-                  </a:txBody>
-                  <a:tcPr/>
-                </a:tc>
-                <a:tc>
-                  <a:txBody>
-                    <a:bodyPr/>
-                    <a:lstStyle/>
-                    <a:p>
-                      <a:r>
-                        <a:rPr sz="1100">
-                          <a:solidFill>
-                            <a:srgbClr val="1F2A44"/>
-                          </a:solidFill>
-                        </a:rPr>
-                        <a:t>&lt;NULL&gt;</a:t>
-                      </a:r>
-                    </a:p>
-                  </a:txBody>
-                  <a:tcPr/>
-                </a:tc>
-                <a:tc>
-                  <a:txBody>
-                    <a:bodyPr/>
-                    <a:lstStyle/>
-                    <a:p>
-                      <a:r>
-                        <a:rPr sz="1100">
-                          <a:solidFill>
-                            <a:srgbClr val="1F2A44"/>
-                          </a:solidFill>
-                        </a:rPr>
-                        <a:t>89,698</a:t>
+                        <a:t>Qty = 0</a:t>
+                      </a:r>
+                    </a:p>
+                  </a:txBody>
+                  <a:tcPr/>
+                </a:tc>
+                <a:tc>
+                  <a:txBody>
+                    <a:bodyPr/>
+                    <a:lstStyle/>
+                    <a:p>
+                      <a:r>
+                        <a:rPr sz="1100">
+                          <a:solidFill>
+                            <a:srgbClr val="1F2A44"/>
+                          </a:solidFill>
+                        </a:rPr>
+                        <a:t>12,807</a:t>
+                      </a:r>
+                    </a:p>
+                  </a:txBody>
+                  <a:tcPr/>
+                </a:tc>
+                <a:tc>
+                  <a:txBody>
+                    <a:bodyPr/>
+                    <a:lstStyle/>
+                    <a:p>
+                      <a:r>
+                        <a:rPr sz="1100">
+                          <a:solidFill>
+                            <a:srgbClr val="1F2A44"/>
+                          </a:solidFill>
+                        </a:rPr>
+                        <a:t>12,703</a:t>
+                      </a:r>
+                    </a:p>
+                  </a:txBody>
+                  <a:tcPr/>
+                </a:tc>
+                <a:tc>
+                  <a:txBody>
+                    <a:bodyPr/>
+                    <a:lstStyle/>
+                    <a:p>
+                      <a:r>
+                        <a:rPr sz="1100">
+                          <a:solidFill>
+                            <a:srgbClr val="1F2A44"/>
+                          </a:solidFill>
+                        </a:rPr>
+                        <a:t>104</a:t>
                       </a:r>
                     </a:p>
                   </a:txBody>
@@ -11129,41 +11448,58 @@
                             <a:srgbClr val="1F2A44"/>
                           </a:solidFill>
                         </a:rPr>
-                        <a:t>Merchant</a:t>
-                      </a:r>
-                    </a:p>
-                  </a:txBody>
-                  <a:tcPr/>
-                </a:tc>
-                <a:tc>
-                  <a:txBody>
-                    <a:bodyPr/>
-                    <a:lstStyle/>
-                    <a:p>
-                      <a:r>
-                        <a:rPr sz="1100">
-                          <a:solidFill>
-                            <a:srgbClr val="1F2A44"/>
-                          </a:solidFill>
-                        </a:rPr>
-                        <a:t>Easy Ship</a:t>
-                      </a:r>
-                    </a:p>
-                  </a:txBody>
-                  <a:tcPr/>
-                </a:tc>
-                <a:tc>
-                  <a:txBody>
-                    <a:bodyPr/>
-                    <a:lstStyle/>
-                    <a:p>
-                      <a:r>
-                        <a:rPr sz="1100">
-                          <a:solidFill>
-                            <a:srgbClr val="1F2A44"/>
-                          </a:solidFill>
-                        </a:rPr>
-                        <a:t>39,277</a:t>
+                        <a:t>Amount missing</a:t>
+                      </a:r>
+                    </a:p>
+                  </a:txBody>
+                  <a:tcPr/>
+                </a:tc>
+                <a:tc>
+                  <a:txBody>
+                    <a:bodyPr/>
+                    <a:lstStyle/>
+                    <a:p>
+                      <a:r>
+                        <a:rPr sz="1100">
+                          <a:solidFill>
+                            <a:srgbClr val="1F2A44"/>
+                          </a:solidFill>
+                        </a:rPr>
+                        <a:t>7,795</a:t>
+                      </a:r>
+                    </a:p>
+                  </a:txBody>
+                  <a:tcPr/>
+                </a:tc>
+                <a:tc>
+                  <a:txBody>
+                    <a:bodyPr/>
+                    <a:lstStyle/>
+                    <a:p>
+                      <a:r>
+                        <a:rPr sz="1100">
+                          <a:solidFill>
+                            <a:srgbClr val="1F2A44"/>
+                          </a:solidFill>
+                        </a:rPr>
+                        <a:t>7,576</a:t>
+                      </a:r>
+                    </a:p>
+                  </a:txBody>
+                  <a:tcPr/>
+                </a:tc>
+                <a:tc>
+                  <a:txBody>
+                    <a:bodyPr/>
+                    <a:lstStyle/>
+                    <a:p>
+                      <a:r>
+                        <a:rPr sz="1100">
+                          <a:solidFill>
+                            <a:srgbClr val="1F2A44"/>
+                          </a:solidFill>
+                        </a:rPr>
+                        <a:t>219</a:t>
                       </a:r>
                     </a:p>
                   </a:txBody>
@@ -11176,14 +11512,14 @@
       </p:graphicFrame>
       <p:sp>
         <p:nvSpPr>
-          <p:cNvPr id="8" name="TextBox 7"/>
+          <p:cNvPr id="5" name="TextBox 4"/>
           <p:cNvSpPr txBox="1"/>
           <p:nvPr/>
         </p:nvSpPr>
         <p:spPr>
           <a:xfrm>
-            <a:off x="6400800" y="1280160"/>
-            <a:ext cx="5486400" cy="365760"/>
+            <a:off x="548640" y="2651760"/>
+            <a:ext cx="11064240" cy="4023359"/>
           </a:xfrm>
           <a:prstGeom prst="rect">
             <a:avLst/>
@@ -11196,370 +11532,63 @@
           </a:bodyPr>
           <a:lstStyle/>
           <a:p>
-            <a:r>
-              <a:rPr sz="1500" b="1" i="0">
+            <a:pPr>
+              <a:spcAft>
+                <a:spcPts val="400"/>
+              </a:spcAft>
+            </a:pPr>
+            <a:r>
+              <a:rPr sz="1400">
                 <a:solidFill>
                   <a:srgbClr val="1F2A44"/>
                 </a:solidFill>
               </a:rPr>
-              <a:t>Casing collapse (D7)</a:t>
-            </a:r>
-          </a:p>
-        </p:txBody>
-      </p:sp>
-      <p:graphicFrame>
-        <p:nvGraphicFramePr>
-          <p:cNvPr id="9" name="Table 8"/>
-          <p:cNvGraphicFramePr>
-            <a:graphicFrameLocks noGrp="1"/>
-          </p:cNvGraphicFramePr>
-          <p:nvPr/>
-        </p:nvGraphicFramePr>
-        <p:xfrm>
-          <a:off x="6400800" y="1691640"/>
-          <a:ext cx="5212080" cy="1380744"/>
-        </p:xfrm>
-        <a:graphic>
-          <a:graphicData uri="http://schemas.openxmlformats.org/drawingml/2006/table">
-            <a:tbl>
-              <a:tblPr firstRow="1" bandRow="1">
-                <a:tableStyleId>{5C22544A-7EE6-4342-B048-85BDC9FD1C3A}</a:tableStyleId>
-              </a:tblPr>
-              <a:tblGrid>
-                <a:gridCol w="1828800"/>
-                <a:gridCol w="1097280"/>
-                <a:gridCol w="1371600"/>
-                <a:gridCol w="914400"/>
-              </a:tblGrid>
-              <a:tr h="345186">
-                <a:tc>
-                  <a:txBody>
-                    <a:bodyPr/>
-                    <a:lstStyle/>
-                    <a:p>
-                      <a:r>
-                        <a:rPr sz="1300" b="1">
-                          <a:solidFill>
-                            <a:srgbClr val="FFFFFF"/>
-                          </a:solidFill>
-                        </a:rPr>
-                        <a:t>Column</a:t>
-                      </a:r>
-                    </a:p>
-                  </a:txBody>
-                  <a:tcPr>
-                    <a:solidFill>
-                      <a:srgbClr val="1F2A44"/>
-                    </a:solidFill>
-                  </a:tcPr>
-                </a:tc>
-                <a:tc>
-                  <a:txBody>
-                    <a:bodyPr/>
-                    <a:lstStyle/>
-                    <a:p>
-                      <a:r>
-                        <a:rPr sz="1300" b="1">
-                          <a:solidFill>
-                            <a:srgbClr val="FFFFFF"/>
-                          </a:solidFill>
-                        </a:rPr>
-                        <a:t>Raw</a:t>
-                      </a:r>
-                    </a:p>
-                  </a:txBody>
-                  <a:tcPr>
-                    <a:solidFill>
-                      <a:srgbClr val="1F2A44"/>
-                    </a:solidFill>
-                  </a:tcPr>
-                </a:tc>
-                <a:tc>
-                  <a:txBody>
-                    <a:bodyPr/>
-                    <a:lstStyle/>
-                    <a:p>
-                      <a:r>
-                        <a:rPr sz="1300" b="1">
-                          <a:solidFill>
-                            <a:srgbClr val="FFFFFF"/>
-                          </a:solidFill>
-                        </a:rPr>
-                        <a:t>Normalized</a:t>
-                      </a:r>
-                    </a:p>
-                  </a:txBody>
-                  <a:tcPr>
-                    <a:solidFill>
-                      <a:srgbClr val="1F2A44"/>
-                    </a:solidFill>
-                  </a:tcPr>
-                </a:tc>
-                <a:tc>
-                  <a:txBody>
-                    <a:bodyPr/>
-                    <a:lstStyle/>
-                    <a:p>
-                      <a:r>
-                        <a:rPr sz="1300" b="1">
-                          <a:solidFill>
-                            <a:srgbClr val="FFFFFF"/>
-                          </a:solidFill>
-                        </a:rPr>
-                        <a:t>% dup</a:t>
-                      </a:r>
-                    </a:p>
-                  </a:txBody>
-                  <a:tcPr>
-                    <a:solidFill>
-                      <a:srgbClr val="1F2A44"/>
-                    </a:solidFill>
-                  </a:tcPr>
-                </a:tc>
-              </a:tr>
-              <a:tr h="345186">
-                <a:tc>
-                  <a:txBody>
-                    <a:bodyPr/>
-                    <a:lstStyle/>
-                    <a:p>
-                      <a:r>
-                        <a:rPr sz="1100">
-                          <a:solidFill>
-                            <a:srgbClr val="1F2A44"/>
-                          </a:solidFill>
-                        </a:rPr>
-                        <a:t>ship-city</a:t>
-                      </a:r>
-                    </a:p>
-                  </a:txBody>
-                  <a:tcPr/>
-                </a:tc>
-                <a:tc>
-                  <a:txBody>
-                    <a:bodyPr/>
-                    <a:lstStyle/>
-                    <a:p>
-                      <a:r>
-                        <a:rPr sz="1100">
-                          <a:solidFill>
-                            <a:srgbClr val="1F2A44"/>
-                          </a:solidFill>
-                        </a:rPr>
-                        <a:t>8,955</a:t>
-                      </a:r>
-                    </a:p>
-                  </a:txBody>
-                  <a:tcPr/>
-                </a:tc>
-                <a:tc>
-                  <a:txBody>
-                    <a:bodyPr/>
-                    <a:lstStyle/>
-                    <a:p>
-                      <a:r>
-                        <a:rPr sz="1100">
-                          <a:solidFill>
-                            <a:srgbClr val="1F2A44"/>
-                          </a:solidFill>
-                        </a:rPr>
-                        <a:t>7,297</a:t>
-                      </a:r>
-                    </a:p>
-                  </a:txBody>
-                  <a:tcPr/>
-                </a:tc>
-                <a:tc>
-                  <a:txBody>
-                    <a:bodyPr/>
-                    <a:lstStyle/>
-                    <a:p>
-                      <a:r>
-                        <a:rPr sz="1100">
-                          <a:solidFill>
-                            <a:srgbClr val="1F2A44"/>
-                          </a:solidFill>
-                        </a:rPr>
-                        <a:t>19%</a:t>
-                      </a:r>
-                    </a:p>
-                  </a:txBody>
-                  <a:tcPr/>
-                </a:tc>
-              </a:tr>
-              <a:tr h="345186">
-                <a:tc>
-                  <a:txBody>
-                    <a:bodyPr/>
-                    <a:lstStyle/>
-                    <a:p>
-                      <a:r>
-                        <a:rPr sz="1100">
-                          <a:solidFill>
-                            <a:srgbClr val="1F2A44"/>
-                          </a:solidFill>
-                        </a:rPr>
-                        <a:t>ship-state</a:t>
-                      </a:r>
-                    </a:p>
-                  </a:txBody>
-                  <a:tcPr/>
-                </a:tc>
-                <a:tc>
-                  <a:txBody>
-                    <a:bodyPr/>
-                    <a:lstStyle/>
-                    <a:p>
-                      <a:r>
-                        <a:rPr sz="1100">
-                          <a:solidFill>
-                            <a:srgbClr val="1F2A44"/>
-                          </a:solidFill>
-                        </a:rPr>
-                        <a:t>69</a:t>
-                      </a:r>
-                    </a:p>
-                  </a:txBody>
-                  <a:tcPr/>
-                </a:tc>
-                <a:tc>
-                  <a:txBody>
-                    <a:bodyPr/>
-                    <a:lstStyle/>
-                    <a:p>
-                      <a:r>
-                        <a:rPr sz="1100">
-                          <a:solidFill>
-                            <a:srgbClr val="1F2A44"/>
-                          </a:solidFill>
-                        </a:rPr>
-                        <a:t>47</a:t>
-                      </a:r>
-                    </a:p>
-                  </a:txBody>
-                  <a:tcPr/>
-                </a:tc>
-                <a:tc>
-                  <a:txBody>
-                    <a:bodyPr/>
-                    <a:lstStyle/>
-                    <a:p>
-                      <a:r>
-                        <a:rPr sz="1100">
-                          <a:solidFill>
-                            <a:srgbClr val="1F2A44"/>
-                          </a:solidFill>
-                        </a:rPr>
-                        <a:t>32%</a:t>
-                      </a:r>
-                    </a:p>
-                  </a:txBody>
-                  <a:tcPr/>
-                </a:tc>
-              </a:tr>
-              <a:tr h="345186">
-                <a:tc>
-                  <a:txBody>
-                    <a:bodyPr/>
-                    <a:lstStyle/>
-                    <a:p>
-                      <a:r>
-                        <a:rPr sz="1100">
-                          <a:solidFill>
-                            <a:srgbClr val="1F2A44"/>
-                          </a:solidFill>
-                        </a:rPr>
-                        <a:t>ship-country</a:t>
-                      </a:r>
-                    </a:p>
-                  </a:txBody>
-                  <a:tcPr/>
-                </a:tc>
-                <a:tc>
-                  <a:txBody>
-                    <a:bodyPr/>
-                    <a:lstStyle/>
-                    <a:p>
-                      <a:r>
-                        <a:rPr sz="1100">
-                          <a:solidFill>
-                            <a:srgbClr val="1F2A44"/>
-                          </a:solidFill>
-                        </a:rPr>
-                        <a:t>1</a:t>
-                      </a:r>
-                    </a:p>
-                  </a:txBody>
-                  <a:tcPr/>
-                </a:tc>
-                <a:tc>
-                  <a:txBody>
-                    <a:bodyPr/>
-                    <a:lstStyle/>
-                    <a:p>
-                      <a:r>
-                        <a:rPr sz="1100">
-                          <a:solidFill>
-                            <a:srgbClr val="1F2A44"/>
-                          </a:solidFill>
-                        </a:rPr>
-                        <a:t>1</a:t>
-                      </a:r>
-                    </a:p>
-                  </a:txBody>
-                  <a:tcPr/>
-                </a:tc>
-                <a:tc>
-                  <a:txBody>
-                    <a:bodyPr/>
-                    <a:lstStyle/>
-                    <a:p>
-                      <a:r>
-                        <a:rPr sz="1100">
-                          <a:solidFill>
-                            <a:srgbClr val="1F2A44"/>
-                          </a:solidFill>
-                        </a:rPr>
-                        <a:t>0%</a:t>
-                      </a:r>
-                    </a:p>
-                  </a:txBody>
-                  <a:tcPr/>
-                </a:tc>
-              </a:tr>
-            </a:tbl>
-          </a:graphicData>
-        </a:graphic>
-      </p:graphicFrame>
-      <p:sp>
-        <p:nvSpPr>
-          <p:cNvPr id="10" name="TextBox 9"/>
-          <p:cNvSpPr txBox="1"/>
-          <p:nvPr/>
-        </p:nvSpPr>
-        <p:spPr>
-          <a:xfrm>
-            <a:off x="6400800" y="3383280"/>
-            <a:ext cx="5212080" cy="914400"/>
-          </a:xfrm>
-          <a:prstGeom prst="rect">
-            <a:avLst/>
-          </a:prstGeom>
-          <a:noFill/>
-        </p:spPr>
-        <p:txBody>
-          <a:bodyPr wrap="square">
-            <a:spAutoFit/>
-          </a:bodyPr>
-          <a:lstStyle/>
-          <a:p>
-            <a:r>
-              <a:rPr sz="1200" b="0" i="1">
-                <a:solidFill>
-                  <a:srgbClr val="6C757D"/>
-                </a:solidFill>
-              </a:rPr>
-              <a:t>India has 36 states + UTs officially — even normalized we see 47 (residual misspellings).</a:t>
+              <a:t>• Cancelled + Amount &gt; 0: 10,766 rows — list price at cancel time. Naïve sum inflates revenue ~15%. → D1 is_cancelled + derived revenue_amount.</a:t>
+            </a:r>
+          </a:p>
+          <a:p>
+            <a:pPr>
+              <a:spcAft>
+                <a:spcPts val="400"/>
+              </a:spcAft>
+            </a:pPr>
+            <a:r>
+              <a:rPr sz="1400">
+                <a:solidFill>
+                  <a:srgbClr val="1F2A44"/>
+                </a:solidFill>
+              </a:rPr>
+              <a:t>• Active-order anomalies to FLAG (not delete): Shipped + Qty=0 = 104, Shipped + Amount missing = 219.</a:t>
+            </a:r>
+          </a:p>
+          <a:p>
+            <a:pPr>
+              <a:spcAft>
+                <a:spcPts val="400"/>
+              </a:spcAft>
+            </a:pPr>
+            <a:r>
+              <a:rPr sz="1400">
+                <a:solidFill>
+                  <a:srgbClr val="1F2A44"/>
+                </a:solidFill>
+              </a:rPr>
+              <a:t>• promotion-ids: 79,822 rows carry data (62%), up to 36 promos/row. → D3 promo_count on fact, bridge deferred.</a:t>
+            </a:r>
+          </a:p>
+          <a:p>
+            <a:pPr>
+              <a:spcAft>
+                <a:spcPts val="400"/>
+              </a:spcAft>
+            </a:pPr>
+            <a:r>
+              <a:rPr sz="1400">
+                <a:solidFill>
+                  <a:srgbClr val="1F2A44"/>
+                </a:solidFill>
+              </a:rPr>
+              <a:t>• Key insight: NULL / unusual values ≠ bad data. Silent filtering destroys signal.</a:t>
             </a:r>
           </a:p>
         </p:txBody>
@@ -11572,7 +11601,7 @@
 </p:sld>
 </file>
 
-<file path=ppt/slides/slide7.xml><?xml version="1.0" encoding="utf-8"?>
+<file path=ppt/slides/slide8.xml><?xml version="1.0" encoding="utf-8"?>
 <p:sld xmlns:a="http://schemas.openxmlformats.org/drawingml/2006/main" xmlns:p="http://schemas.openxmlformats.org/presentationml/2006/main" xmlns:r="http://schemas.openxmlformats.org/officeDocument/2006/relationships">
   <p:cSld>
     <p:bg>
@@ -11618,7 +11647,7 @@
                   <a:srgbClr val="1F2A44"/>
                 </a:solidFill>
               </a:rPr>
-              <a:t>Not every anomaly is bad data</a:t>
+              <a:t>Data quality treatment strategy</a:t>
             </a:r>
           </a:p>
         </p:txBody>
@@ -11676,445 +11705,6 @@
         </p:nvGraphicFramePr>
         <p:xfrm>
           <a:off x="548640" y="1280160"/>
-          <a:ext cx="11064240" cy="1088136"/>
-        </p:xfrm>
-        <a:graphic>
-          <a:graphicData uri="http://schemas.openxmlformats.org/drawingml/2006/table">
-            <a:tbl>
-              <a:tblPr firstRow="1" bandRow="1">
-                <a:tableStyleId>{5C22544A-7EE6-4342-B048-85BDC9FD1C3A}</a:tableStyleId>
-              </a:tblPr>
-              <a:tblGrid>
-                <a:gridCol w="4114800"/>
-                <a:gridCol w="2286000"/>
-                <a:gridCol w="2286000"/>
-                <a:gridCol w="2377440"/>
-              </a:tblGrid>
-              <a:tr h="362712">
-                <a:tc>
-                  <a:txBody>
-                    <a:bodyPr/>
-                    <a:lstStyle/>
-                    <a:p>
-                      <a:r>
-                        <a:rPr sz="1300" b="1">
-                          <a:solidFill>
-                            <a:srgbClr val="FFFFFF"/>
-                          </a:solidFill>
-                        </a:rPr>
-                        <a:t>Condition</a:t>
-                      </a:r>
-                    </a:p>
-                  </a:txBody>
-                  <a:tcPr>
-                    <a:solidFill>
-                      <a:srgbClr val="1F2A44"/>
-                    </a:solidFill>
-                  </a:tcPr>
-                </a:tc>
-                <a:tc>
-                  <a:txBody>
-                    <a:bodyPr/>
-                    <a:lstStyle/>
-                    <a:p>
-                      <a:r>
-                        <a:rPr sz="1300" b="1">
-                          <a:solidFill>
-                            <a:srgbClr val="FFFFFF"/>
-                          </a:solidFill>
-                        </a:rPr>
-                        <a:t>Total</a:t>
-                      </a:r>
-                    </a:p>
-                  </a:txBody>
-                  <a:tcPr>
-                    <a:solidFill>
-                      <a:srgbClr val="1F2A44"/>
-                    </a:solidFill>
-                  </a:tcPr>
-                </a:tc>
-                <a:tc>
-                  <a:txBody>
-                    <a:bodyPr/>
-                    <a:lstStyle/>
-                    <a:p>
-                      <a:r>
-                        <a:rPr sz="1300" b="1">
-                          <a:solidFill>
-                            <a:srgbClr val="FFFFFF"/>
-                          </a:solidFill>
-                        </a:rPr>
-                        <a:t>Cancelled</a:t>
-                      </a:r>
-                    </a:p>
-                  </a:txBody>
-                  <a:tcPr>
-                    <a:solidFill>
-                      <a:srgbClr val="1F2A44"/>
-                    </a:solidFill>
-                  </a:tcPr>
-                </a:tc>
-                <a:tc>
-                  <a:txBody>
-                    <a:bodyPr/>
-                    <a:lstStyle/>
-                    <a:p>
-                      <a:r>
-                        <a:rPr sz="1300" b="1">
-                          <a:solidFill>
-                            <a:srgbClr val="FFFFFF"/>
-                          </a:solidFill>
-                        </a:rPr>
-                        <a:t>Shipped</a:t>
-                      </a:r>
-                    </a:p>
-                  </a:txBody>
-                  <a:tcPr>
-                    <a:solidFill>
-                      <a:srgbClr val="1F2A44"/>
-                    </a:solidFill>
-                  </a:tcPr>
-                </a:tc>
-              </a:tr>
-              <a:tr h="362712">
-                <a:tc>
-                  <a:txBody>
-                    <a:bodyPr/>
-                    <a:lstStyle/>
-                    <a:p>
-                      <a:r>
-                        <a:rPr sz="1100">
-                          <a:solidFill>
-                            <a:srgbClr val="1F2A44"/>
-                          </a:solidFill>
-                        </a:rPr>
-                        <a:t>Qty = 0</a:t>
-                      </a:r>
-                    </a:p>
-                  </a:txBody>
-                  <a:tcPr/>
-                </a:tc>
-                <a:tc>
-                  <a:txBody>
-                    <a:bodyPr/>
-                    <a:lstStyle/>
-                    <a:p>
-                      <a:r>
-                        <a:rPr sz="1100">
-                          <a:solidFill>
-                            <a:srgbClr val="1F2A44"/>
-                          </a:solidFill>
-                        </a:rPr>
-                        <a:t>12,807</a:t>
-                      </a:r>
-                    </a:p>
-                  </a:txBody>
-                  <a:tcPr/>
-                </a:tc>
-                <a:tc>
-                  <a:txBody>
-                    <a:bodyPr/>
-                    <a:lstStyle/>
-                    <a:p>
-                      <a:r>
-                        <a:rPr sz="1100">
-                          <a:solidFill>
-                            <a:srgbClr val="1F2A44"/>
-                          </a:solidFill>
-                        </a:rPr>
-                        <a:t>12,703</a:t>
-                      </a:r>
-                    </a:p>
-                  </a:txBody>
-                  <a:tcPr/>
-                </a:tc>
-                <a:tc>
-                  <a:txBody>
-                    <a:bodyPr/>
-                    <a:lstStyle/>
-                    <a:p>
-                      <a:r>
-                        <a:rPr sz="1100">
-                          <a:solidFill>
-                            <a:srgbClr val="1F2A44"/>
-                          </a:solidFill>
-                        </a:rPr>
-                        <a:t>104</a:t>
-                      </a:r>
-                    </a:p>
-                  </a:txBody>
-                  <a:tcPr/>
-                </a:tc>
-              </a:tr>
-              <a:tr h="362712">
-                <a:tc>
-                  <a:txBody>
-                    <a:bodyPr/>
-                    <a:lstStyle/>
-                    <a:p>
-                      <a:r>
-                        <a:rPr sz="1100">
-                          <a:solidFill>
-                            <a:srgbClr val="1F2A44"/>
-                          </a:solidFill>
-                        </a:rPr>
-                        <a:t>Amount missing</a:t>
-                      </a:r>
-                    </a:p>
-                  </a:txBody>
-                  <a:tcPr/>
-                </a:tc>
-                <a:tc>
-                  <a:txBody>
-                    <a:bodyPr/>
-                    <a:lstStyle/>
-                    <a:p>
-                      <a:r>
-                        <a:rPr sz="1100">
-                          <a:solidFill>
-                            <a:srgbClr val="1F2A44"/>
-                          </a:solidFill>
-                        </a:rPr>
-                        <a:t>7,795</a:t>
-                      </a:r>
-                    </a:p>
-                  </a:txBody>
-                  <a:tcPr/>
-                </a:tc>
-                <a:tc>
-                  <a:txBody>
-                    <a:bodyPr/>
-                    <a:lstStyle/>
-                    <a:p>
-                      <a:r>
-                        <a:rPr sz="1100">
-                          <a:solidFill>
-                            <a:srgbClr val="1F2A44"/>
-                          </a:solidFill>
-                        </a:rPr>
-                        <a:t>7,576</a:t>
-                      </a:r>
-                    </a:p>
-                  </a:txBody>
-                  <a:tcPr/>
-                </a:tc>
-                <a:tc>
-                  <a:txBody>
-                    <a:bodyPr/>
-                    <a:lstStyle/>
-                    <a:p>
-                      <a:r>
-                        <a:rPr sz="1100">
-                          <a:solidFill>
-                            <a:srgbClr val="1F2A44"/>
-                          </a:solidFill>
-                        </a:rPr>
-                        <a:t>219</a:t>
-                      </a:r>
-                    </a:p>
-                  </a:txBody>
-                  <a:tcPr/>
-                </a:tc>
-              </a:tr>
-            </a:tbl>
-          </a:graphicData>
-        </a:graphic>
-      </p:graphicFrame>
-      <p:sp>
-        <p:nvSpPr>
-          <p:cNvPr id="5" name="TextBox 4"/>
-          <p:cNvSpPr txBox="1"/>
-          <p:nvPr/>
-        </p:nvSpPr>
-        <p:spPr>
-          <a:xfrm>
-            <a:off x="548640" y="2651760"/>
-            <a:ext cx="11064240" cy="4023359"/>
-          </a:xfrm>
-          <a:prstGeom prst="rect">
-            <a:avLst/>
-          </a:prstGeom>
-          <a:noFill/>
-        </p:spPr>
-        <p:txBody>
-          <a:bodyPr wrap="square">
-            <a:spAutoFit/>
-          </a:bodyPr>
-          <a:lstStyle/>
-          <a:p>
-            <a:pPr>
-              <a:spcAft>
-                <a:spcPts val="400"/>
-              </a:spcAft>
-            </a:pPr>
-            <a:r>
-              <a:rPr sz="1400">
-                <a:solidFill>
-                  <a:srgbClr val="1F2A44"/>
-                </a:solidFill>
-              </a:rPr>
-              <a:t>• Cancelled + Amount &gt; 0: 10,766 rows — list price at cancel time. Naïve sum inflates revenue ~15%. → D1 is_cancelled + derived revenue_amount.</a:t>
-            </a:r>
-          </a:p>
-          <a:p>
-            <a:pPr>
-              <a:spcAft>
-                <a:spcPts val="400"/>
-              </a:spcAft>
-            </a:pPr>
-            <a:r>
-              <a:rPr sz="1400">
-                <a:solidFill>
-                  <a:srgbClr val="1F2A44"/>
-                </a:solidFill>
-              </a:rPr>
-              <a:t>• Active-order anomalies to FLAG (not delete): Shipped + Qty=0 = 104, Shipped + Amount missing = 219.</a:t>
-            </a:r>
-          </a:p>
-          <a:p>
-            <a:pPr>
-              <a:spcAft>
-                <a:spcPts val="400"/>
-              </a:spcAft>
-            </a:pPr>
-            <a:r>
-              <a:rPr sz="1400">
-                <a:solidFill>
-                  <a:srgbClr val="1F2A44"/>
-                </a:solidFill>
-              </a:rPr>
-              <a:t>• promotion-ids: 79,822 rows carry data (62%), up to 36 promos/row. → D3 promo_count on fact, bridge deferred.</a:t>
-            </a:r>
-          </a:p>
-          <a:p>
-            <a:pPr>
-              <a:spcAft>
-                <a:spcPts val="400"/>
-              </a:spcAft>
-            </a:pPr>
-            <a:r>
-              <a:rPr sz="1400">
-                <a:solidFill>
-                  <a:srgbClr val="1F2A44"/>
-                </a:solidFill>
-              </a:rPr>
-              <a:t>• Key insight: NULL / unusual values ≠ bad data. Silent filtering destroys signal.</a:t>
-            </a:r>
-          </a:p>
-        </p:txBody>
-      </p:sp>
-    </p:spTree>
-  </p:cSld>
-  <p:clrMapOvr>
-    <a:masterClrMapping/>
-  </p:clrMapOvr>
-</p:sld>
-</file>
-
-<file path=ppt/slides/slide8.xml><?xml version="1.0" encoding="utf-8"?>
-<p:sld xmlns:a="http://schemas.openxmlformats.org/drawingml/2006/main" xmlns:p="http://schemas.openxmlformats.org/presentationml/2006/main" xmlns:r="http://schemas.openxmlformats.org/officeDocument/2006/relationships">
-  <p:cSld>
-    <p:bg>
-      <p:bgPr>
-        <a:solidFill>
-          <a:srgbClr val="F5F6F8"/>
-        </a:solidFill>
-        <a:effectLst/>
-      </p:bgPr>
-    </p:bg>
-    <p:spTree>
-      <p:nvGrpSpPr>
-        <p:cNvPr id="1" name=""/>
-        <p:cNvGrpSpPr/>
-        <p:nvPr/>
-      </p:nvGrpSpPr>
-      <p:grpSpPr/>
-      <p:sp>
-        <p:nvSpPr>
-          <p:cNvPr id="2" name="TextBox 1"/>
-          <p:cNvSpPr txBox="1"/>
-          <p:nvPr/>
-        </p:nvSpPr>
-        <p:spPr>
-          <a:xfrm>
-            <a:off x="548640" y="320040"/>
-            <a:ext cx="10972800" cy="731520"/>
-          </a:xfrm>
-          <a:prstGeom prst="rect">
-            <a:avLst/>
-          </a:prstGeom>
-          <a:noFill/>
-        </p:spPr>
-        <p:txBody>
-          <a:bodyPr wrap="square">
-            <a:spAutoFit/>
-          </a:bodyPr>
-          <a:lstStyle/>
-          <a:p>
-            <a:r>
-              <a:rPr sz="2600" b="1" i="0">
-                <a:solidFill>
-                  <a:srgbClr val="1F2A44"/>
-                </a:solidFill>
-              </a:rPr>
-              <a:t>Data quality treatment strategy</a:t>
-            </a:r>
-          </a:p>
-        </p:txBody>
-      </p:sp>
-      <p:sp>
-        <p:nvSpPr>
-          <p:cNvPr id="3" name="Rectangle 2"/>
-          <p:cNvSpPr/>
-          <p:nvPr/>
-        </p:nvSpPr>
-        <p:spPr>
-          <a:xfrm>
-            <a:off x="548640" y="1005840"/>
-            <a:ext cx="1097280" cy="73152"/>
-          </a:xfrm>
-          <a:prstGeom prst="rect">
-            <a:avLst/>
-          </a:prstGeom>
-          <a:solidFill>
-            <a:srgbClr val="C0392B"/>
-          </a:solidFill>
-          <a:ln>
-            <a:noFill/>
-          </a:ln>
-        </p:spPr>
-        <p:style>
-          <a:lnRef idx="1">
-            <a:schemeClr val="accent1"/>
-          </a:lnRef>
-          <a:fillRef idx="3">
-            <a:schemeClr val="accent1"/>
-          </a:fillRef>
-          <a:effectRef idx="2">
-            <a:schemeClr val="accent1"/>
-          </a:effectRef>
-          <a:fontRef idx="minor">
-            <a:schemeClr val="lt1"/>
-          </a:fontRef>
-        </p:style>
-        <p:txBody>
-          <a:bodyPr rtlCol="0" anchor="ctr"/>
-          <a:lstStyle/>
-          <a:p>
-            <a:pPr algn="ctr"/>
-          </a:p>
-        </p:txBody>
-      </p:sp>
-      <p:graphicFrame>
-        <p:nvGraphicFramePr>
-          <p:cNvPr id="4" name="Table 3"/>
-          <p:cNvGraphicFramePr>
-            <a:graphicFrameLocks noGrp="1"/>
-          </p:cNvGraphicFramePr>
-          <p:nvPr/>
-        </p:nvGraphicFramePr>
-        <p:xfrm>
-          <a:off x="548640" y="1280160"/>
           <a:ext cx="11064240" cy="1965960"/>
         </p:xfrm>
         <a:graphic>
@@ -12383,7 +11973,7 @@
                   <a:srgbClr val="C0392B"/>
                 </a:solidFill>
               </a:rPr>
-              <a:t>Guiding principle: improve data quality without destroying business information.</a:t>
+              <a:t>Visible in detail in dbt docs.</a:t>
             </a:r>
           </a:p>
         </p:txBody>

--- a/presentations/final_deck.pptx
+++ b/presentations/final_deck.pptx
@@ -7273,7 +7273,7 @@
                   <a:srgbClr val="1F2A44"/>
                 </a:solidFill>
               </a:rPr>
-              <a:t>Testing strategy — 77 tests, tiered severity</a:t>
+              <a:t>Testing strategy — 79 tests, tiered severity</a:t>
             </a:r>
           </a:p>
         </p:txBody>
